--- a/样板间投顾组合净值预估/中证全指投顾说明/守正组合构建及回测.pptx
+++ b/样板间投顾组合净值预估/中证全指投顾说明/守正组合构建及回测.pptx
@@ -1,23 +1,23 @@
 
 <file path=ppt/presentation.xml><?xml version="1.0" encoding="utf-8"?>
-<p:presentation xmlns:r="http://schemas.openxmlformats.org/officeDocument/2006/relationships" xmlns:p="http://schemas.openxmlformats.org/presentationml/2006/main" xmlns:a="http://schemas.openxmlformats.org/drawingml/2006/main" firstSlideNum="1">
+<p:presentation xmlns:a="http://schemas.openxmlformats.org/drawingml/2006/main" xmlns:r="http://schemas.openxmlformats.org/officeDocument/2006/relationships" xmlns:p="http://schemas.openxmlformats.org/presentationml/2006/main">
   <p:sldMasterIdLst>
-    <p:sldMasterId id="2147483648" r:id="rId0"/>
+    <p:sldMasterId id="2147483648" r:id="rId1"/>
   </p:sldMasterIdLst>
   <p:notesMasterIdLst>
-    <p:notesMasterId r:id="rId11"/>
+    <p:notesMasterId r:id="rId12"/>
   </p:notesMasterIdLst>
   <p:sldIdLst>
-    <p:sldId id="256" r:id="rId1"/>
-    <p:sldId id="257" r:id="rId2"/>
-    <p:sldId id="258" r:id="rId3"/>
-    <p:sldId id="259" r:id="rId4"/>
-    <p:sldId id="260" r:id="rId5"/>
-    <p:sldId id="261" r:id="rId6"/>
-    <p:sldId id="262" r:id="rId7"/>
-    <p:sldId id="263" r:id="rId8"/>
-    <p:sldId id="264" r:id="rId9"/>
-    <p:sldId id="265" r:id="rId10"/>
+    <p:sldId id="256" r:id="rId2"/>
+    <p:sldId id="257" r:id="rId3"/>
+    <p:sldId id="258" r:id="rId4"/>
+    <p:sldId id="259" r:id="rId5"/>
+    <p:sldId id="260" r:id="rId6"/>
+    <p:sldId id="261" r:id="rId7"/>
+    <p:sldId id="262" r:id="rId8"/>
+    <p:sldId id="263" r:id="rId9"/>
+    <p:sldId id="264" r:id="rId10"/>
+    <p:sldId id="265" r:id="rId11"/>
   </p:sldIdLst>
   <p:sldSz cx="12192000" cy="6858000"/>
   <p:notesSz cx="6858000" cy="12192000"/>
@@ -113,11 +113,16 @@
       </a:defRPr>
     </a:lvl9pPr>
   </p:defaultTextStyle>
+  <p:extLst>
+    <p:ext uri="{EFAFB233-063F-42B5-8137-9DF3F51BA10A}">
+      <p15:sldGuideLst xmlns:p15="http://schemas.microsoft.com/office/powerpoint/2012/main"/>
+    </p:ext>
+  </p:extLst>
 </p:presentation>
 </file>
 
 <file path=ppt/notesMasters/notesMaster1.xml><?xml version="1.0" encoding="utf-8"?>
-<p:notesMaster xmlns:p="http://schemas.openxmlformats.org/presentationml/2006/main" xmlns:a="http://schemas.openxmlformats.org/drawingml/2006/main">
+<p:notesMaster xmlns:a="http://schemas.openxmlformats.org/drawingml/2006/main" xmlns:r="http://schemas.openxmlformats.org/officeDocument/2006/relationships" xmlns:p="http://schemas.openxmlformats.org/presentationml/2006/main">
   <p:cSld>
     <p:bg>
       <p:bgRef idx="1001">
@@ -139,6 +144,11 @@
         </a:xfrm>
       </p:grpSpPr>
     </p:spTree>
+    <p:extLst>
+      <p:ext uri="{BB962C8B-B14F-4D97-AF65-F5344CB8AC3E}">
+        <p14:creationId xmlns:p14="http://schemas.microsoft.com/office/powerpoint/2010/main" val="600764962"/>
+      </p:ext>
+    </p:extLst>
   </p:cSld>
   <p:clrMap bg1="lt1" tx1="dk1" bg2="lt2" tx2="dk2" accent1="accent1" accent2="accent2" accent3="accent3" accent4="accent4" accent5="accent5" accent6="accent6" hlink="hlink" folHlink="folHlink"/>
   <p:notesStyle>
@@ -237,7 +247,7 @@
 </file>
 
 <file path=ppt/slideLayouts/slideLayout1.xml><?xml version="1.0" encoding="utf-8"?>
-<p:sldLayout xmlns:p="http://schemas.openxmlformats.org/presentationml/2006/main" xmlns:a="http://schemas.openxmlformats.org/drawingml/2006/main">
+<p:sldLayout xmlns:a="http://schemas.openxmlformats.org/drawingml/2006/main" xmlns:r="http://schemas.openxmlformats.org/officeDocument/2006/relationships" xmlns:p="http://schemas.openxmlformats.org/presentationml/2006/main">
   <p:cSld name="DEFAULT">
     <p:bg>
       <p:bgRef idx="1001">
@@ -267,11 +277,11 @@
 </file>
 
 <file path=ppt/slideLayouts/slideLayout2.xml><?xml version="1.0" encoding="utf-8"?>
-<p:sldLayout xmlns:p="http://schemas.openxmlformats.org/presentationml/2006/main" xmlns:a="http://schemas.openxmlformats.org/drawingml/2006/main" type="blank">
+<p:sldLayout xmlns:a="http://schemas.openxmlformats.org/drawingml/2006/main" xmlns:r="http://schemas.openxmlformats.org/officeDocument/2006/relationships" xmlns:p="http://schemas.openxmlformats.org/presentationml/2006/main" type="blank">
   <p:cSld name="Blank">
     <p:spTree>
       <p:nvGrpSpPr>
-        <p:cNvPr id="2" name=""/>
+        <p:cNvPr id="1" name=""/>
         <p:cNvGrpSpPr/>
         <p:nvPr/>
       </p:nvGrpSpPr>
@@ -306,7 +316,6 @@
           <a:bodyPr/>
           <a:lstStyle/>
           <a:p>
-            <a:pPr/>
             <a:fld id="{5BCAD085-E8A6-8845-BD4E-CB4CCA059FC4}" type="datetimeFigureOut">
               <a:rPr lang="en-US" smtClean="0"/>
               <a:t>10/16/2026</a:t>
@@ -338,7 +347,6 @@
           <a:bodyPr/>
           <a:lstStyle/>
           <a:p>
-            <a:pPr/>
             <a:endParaRPr lang="en-US"/>
           </a:p>
         </p:txBody>
@@ -366,7 +374,6 @@
           <a:bodyPr/>
           <a:lstStyle/>
           <a:p>
-            <a:pPr/>
             <a:fld id="{C1FF6DA9-008F-8B48-92A6-B652298478BF}" type="slidenum">
               <a:rPr lang="en-US" smtClean="0"/>
               <a:t>‹#›</a:t>
@@ -384,7 +391,7 @@
 </file>
 
 <file path=ppt/slideMasters/slideMaster1.xml><?xml version="1.0" encoding="utf-8"?>
-<p:sldMaster xmlns:r="http://schemas.openxmlformats.org/officeDocument/2006/relationships" xmlns:p="http://schemas.openxmlformats.org/presentationml/2006/main" xmlns:a="http://schemas.openxmlformats.org/drawingml/2006/main">
+<p:sldMaster xmlns:a="http://schemas.openxmlformats.org/drawingml/2006/main" xmlns:r="http://schemas.openxmlformats.org/officeDocument/2006/relationships" xmlns:p="http://schemas.openxmlformats.org/presentationml/2006/main">
   <p:cSld>
     <p:bg>
       <p:bgRef idx="1001">
@@ -409,8 +416,8 @@
   </p:cSld>
   <p:clrMap bg1="lt1" tx1="dk1" bg2="lt2" tx2="dk2" accent1="accent1" accent2="accent2" accent3="accent3" accent4="accent4" accent5="accent5" accent6="accent6" hlink="hlink" folHlink="folHlink"/>
   <p:sldLayoutIdLst>
-    <p:sldLayoutId id="2147483649" r:id="rId0"/>
-    <p:sldLayoutId id="2147483650" r:id="rId1"/>
+    <p:sldLayoutId id="2147483649" r:id="rId1"/>
+    <p:sldLayoutId id="2147483650" r:id="rId2"/>
   </p:sldLayoutIdLst>
   <p:hf sldNum="0" hdr="0" ftr="0" dt="0"/>
   <p:txStyles>
@@ -667,7 +674,7 @@
 </file>
 
 <file path=ppt/slides/slide1.xml><?xml version="1.0" encoding="utf-8"?>
-<p:sld xmlns:a16="http://schemas.microsoft.com/office/drawing/2014/main" xmlns:p="http://schemas.openxmlformats.org/presentationml/2006/main" xmlns:a="http://schemas.openxmlformats.org/drawingml/2006/main" xmlns:mc="http://schemas.openxmlformats.org/markup-compatibility/2006" mc:Ignorable="a16">
+<p:sld xmlns:a="http://schemas.openxmlformats.org/drawingml/2006/main" xmlns:r="http://schemas.openxmlformats.org/officeDocument/2006/relationships" xmlns:p="http://schemas.openxmlformats.org/presentationml/2006/main">
   <p:cSld>
     <p:spTree>
       <p:nvGrpSpPr>
@@ -706,7 +713,6 @@
           <a:bodyPr/>
           <a:lstStyle/>
           <a:p>
-            <a:pPr/>
             <a:r>
               <a:rPr lang="zh-CN" sz="2100" b="1" dirty="0">
                 <a:solidFill>
@@ -746,7 +752,6 @@
           <a:bodyPr/>
           <a:lstStyle/>
           <a:p>
-            <a:pPr/>
             <a:endParaRPr/>
           </a:p>
         </p:txBody>
@@ -774,7 +779,6 @@
           <a:bodyPr/>
           <a:lstStyle/>
           <a:p>
-            <a:pPr/>
             <a:r>
               <a:rPr lang="zh-CN" sz="800" dirty="0">
                 <a:solidFill>
@@ -783,7 +787,7 @@
                 <a:latin typeface="Microsoft YaHei"/>
                 <a:ea typeface="Microsoft YaHei"/>
               </a:rPr>
-              <a:t xml:space="preserve">数据来源：中证指数公司、Wind；收益风险特征基于 H00985 全收益日度序列计算（2005-01-04 至 2026-09-30，共 5282 个交易日，无风险利率假设 </a:t>
+              <a:t>数据来源：中证指数公司、Wind；收益风险特征基于 H00985 全收益日度序列计算（2005-01-04 至 2026-09-30，共 5282 个交易日，无风险利率假设 </a:t>
             </a:r>
             <a:r>
               <a:rPr lang="en-US" altLang="zh-CN" sz="800" dirty="0">
@@ -834,7 +838,6 @@
           <a:bodyPr/>
           <a:lstStyle/>
           <a:p>
-            <a:pPr/>
             <a:endParaRPr/>
           </a:p>
         </p:txBody>
@@ -864,7 +867,6 @@
           <a:bodyPr/>
           <a:lstStyle/>
           <a:p>
-            <a:pPr/>
             <a:endParaRPr/>
           </a:p>
         </p:txBody>
@@ -892,7 +894,6 @@
           <a:bodyPr/>
           <a:lstStyle/>
           <a:p>
-            <a:pPr/>
             <a:r>
               <a:rPr lang="zh-CN" b="1" dirty="0">
                 <a:solidFill>
@@ -930,7 +931,6 @@
           <a:bodyPr/>
           <a:lstStyle/>
           <a:p>
-            <a:pPr/>
             <a:r>
               <a:rPr lang="zh-CN" sz="1400" b="1" dirty="0">
                 <a:solidFill>
@@ -1008,7 +1008,6 @@
           <a:bodyPr/>
           <a:lstStyle/>
           <a:p>
-            <a:pPr/>
             <a:r>
               <a:rPr lang="zh-CN" sz="1050" dirty="0">
                 <a:latin typeface="Microsoft YaHei"/>
@@ -1073,7 +1072,6 @@
           <a:bodyPr/>
           <a:lstStyle/>
           <a:p>
-            <a:pPr/>
             <a:endParaRPr sz="2400">
               <a:latin typeface="微软雅黑" panose="020B0503020204020204" pitchFamily="34" charset="-122"/>
               <a:ea typeface="微软雅黑" panose="020B0503020204020204" pitchFamily="34" charset="-122"/>
@@ -1106,7 +1104,6 @@
           <a:bodyPr/>
           <a:lstStyle/>
           <a:p>
-            <a:pPr/>
             <a:endParaRPr sz="2400">
               <a:latin typeface="微软雅黑" panose="020B0503020204020204" pitchFamily="34" charset="-122"/>
               <a:ea typeface="微软雅黑" panose="020B0503020204020204" pitchFamily="34" charset="-122"/>
@@ -1137,7 +1134,6 @@
           <a:bodyPr/>
           <a:lstStyle/>
           <a:p>
-            <a:pPr/>
             <a:r>
               <a:rPr lang="zh-CN" sz="1600" b="1" dirty="0">
                 <a:solidFill>
@@ -1175,7 +1171,6 @@
           <a:bodyPr/>
           <a:lstStyle/>
           <a:p>
-            <a:pPr/>
             <a:r>
               <a:rPr lang="zh-CN" sz="1400" b="1" dirty="0">
                 <a:solidFill>
@@ -1239,7 +1234,6 @@
           <a:bodyPr/>
           <a:lstStyle/>
           <a:p>
-            <a:pPr/>
             <a:r>
               <a:rPr lang="zh-CN" sz="1000" dirty="0">
                 <a:latin typeface="微软雅黑" panose="020B0503020204020204" pitchFamily="34" charset="-122"/>
@@ -1266,7 +1260,7 @@
                 <a:latin typeface="微软雅黑" panose="020B0503020204020204" pitchFamily="34" charset="-122"/>
                 <a:ea typeface="微软雅黑" panose="020B0503020204020204" pitchFamily="34" charset="-122"/>
               </a:rPr>
-              <a:t xml:space="preserve">/ </a:t>
+              <a:t>/ </a:t>
             </a:r>
             <a:r>
               <a:rPr lang="zh-CN" sz="1000" dirty="0">
@@ -1328,7 +1322,6 @@
           <a:bodyPr/>
           <a:lstStyle/>
           <a:p>
-            <a:pPr/>
             <a:endParaRPr sz="2400">
               <a:latin typeface="微软雅黑" panose="020B0503020204020204" pitchFamily="34" charset="-122"/>
               <a:ea typeface="微软雅黑" panose="020B0503020204020204" pitchFamily="34" charset="-122"/>
@@ -1361,7 +1354,6 @@
           <a:bodyPr/>
           <a:lstStyle/>
           <a:p>
-            <a:pPr/>
             <a:endParaRPr sz="2400">
               <a:latin typeface="微软雅黑" panose="020B0503020204020204" pitchFamily="34" charset="-122"/>
               <a:ea typeface="微软雅黑" panose="020B0503020204020204" pitchFamily="34" charset="-122"/>
@@ -1392,7 +1384,6 @@
           <a:bodyPr/>
           <a:lstStyle/>
           <a:p>
-            <a:pPr/>
             <a:r>
               <a:rPr lang="zh-CN" sz="1600" b="1">
                 <a:solidFill>
@@ -1430,7 +1421,6 @@
           <a:bodyPr/>
           <a:lstStyle/>
           <a:p>
-            <a:pPr/>
             <a:r>
               <a:rPr lang="zh-CN" altLang="en-US" sz="1400" b="1" dirty="0" smtClean="0">
                 <a:solidFill>
@@ -1474,7 +1464,6 @@
           <a:bodyPr/>
           <a:lstStyle/>
           <a:p>
-            <a:pPr/>
             <a:r>
               <a:rPr lang="zh-CN" sz="1000" dirty="0">
                 <a:latin typeface="微软雅黑" panose="020B0503020204020204" pitchFamily="34" charset="-122"/>
@@ -1528,7 +1517,6 @@
           <a:bodyPr/>
           <a:lstStyle/>
           <a:p>
-            <a:pPr/>
             <a:endParaRPr sz="2400">
               <a:latin typeface="微软雅黑" panose="020B0503020204020204" pitchFamily="34" charset="-122"/>
               <a:ea typeface="微软雅黑" panose="020B0503020204020204" pitchFamily="34" charset="-122"/>
@@ -1561,7 +1549,6 @@
           <a:bodyPr/>
           <a:lstStyle/>
           <a:p>
-            <a:pPr/>
             <a:endParaRPr sz="2400">
               <a:latin typeface="微软雅黑" panose="020B0503020204020204" pitchFamily="34" charset="-122"/>
               <a:ea typeface="微软雅黑" panose="020B0503020204020204" pitchFamily="34" charset="-122"/>
@@ -1592,7 +1579,6 @@
           <a:bodyPr/>
           <a:lstStyle/>
           <a:p>
-            <a:pPr/>
             <a:r>
               <a:rPr lang="zh-CN" sz="1600" b="1">
                 <a:solidFill>
@@ -1630,7 +1616,6 @@
           <a:bodyPr/>
           <a:lstStyle/>
           <a:p>
-            <a:pPr/>
             <a:r>
               <a:rPr lang="zh-CN" altLang="en-US" sz="1400" b="1" dirty="0" smtClean="0">
                 <a:solidFill>
@@ -1674,7 +1659,6 @@
           <a:bodyPr/>
           <a:lstStyle/>
           <a:p>
-            <a:pPr/>
             <a:r>
               <a:rPr lang="zh-CN" altLang="en-US" sz="1000" dirty="0">
                 <a:latin typeface="微软雅黑" panose="020B0503020204020204" pitchFamily="34" charset="-122"/>
@@ -1687,7 +1671,7 @@
                 <a:latin typeface="微软雅黑" panose="020B0503020204020204" pitchFamily="34" charset="-122"/>
                 <a:ea typeface="微软雅黑" panose="020B0503020204020204" pitchFamily="34" charset="-122"/>
               </a:rPr>
-              <a:t xml:space="preserve">化约 </a:t>
+              <a:t>化约 </a:t>
             </a:r>
             <a:r>
               <a:rPr lang="en-US" altLang="zh-CN" sz="1000" dirty="0" smtClean="0">
@@ -1723,7 +1707,6 @@
             </a:endParaRPr>
           </a:p>
           <a:p>
-            <a:pPr/>
             <a:endParaRPr lang="en-US" altLang="zh-CN" sz="1000" dirty="0" smtClean="0">
               <a:solidFill>
                 <a:schemeClr val="bg1">
@@ -1735,7 +1718,6 @@
             </a:endParaRPr>
           </a:p>
           <a:p>
-            <a:pPr/>
             <a:r>
               <a:rPr lang="en-US" altLang="zh-CN" sz="1000" dirty="0" smtClean="0">
                 <a:solidFill>
@@ -1746,7 +1728,7 @@
                 <a:latin typeface="微软雅黑" panose="020B0503020204020204" pitchFamily="34" charset="-122"/>
                 <a:ea typeface="微软雅黑" panose="020B0503020204020204" pitchFamily="34" charset="-122"/>
               </a:rPr>
-              <a:t xml:space="preserve">2015-2025 </a:t>
+              <a:t>2015-2025 </a:t>
             </a:r>
             <a:r>
               <a:rPr lang="zh-CN" altLang="en-US" sz="1000" dirty="0" smtClean="0">
@@ -1758,7 +1740,7 @@
                 <a:latin typeface="微软雅黑" panose="020B0503020204020204" pitchFamily="34" charset="-122"/>
                 <a:ea typeface="微软雅黑" panose="020B0503020204020204" pitchFamily="34" charset="-122"/>
               </a:rPr>
-              <a:t xml:space="preserve">年 </a:t>
+              <a:t>年 </a:t>
             </a:r>
             <a:r>
               <a:rPr lang="en-US" altLang="zh-CN" sz="1000" dirty="0" smtClean="0">
@@ -1782,7 +1764,7 @@
                 <a:latin typeface="微软雅黑" panose="020B0503020204020204" pitchFamily="34" charset="-122"/>
                 <a:ea typeface="微软雅黑" panose="020B0503020204020204" pitchFamily="34" charset="-122"/>
               </a:rPr>
-              <a:t xml:space="preserve">股全市场利润从 </a:t>
+              <a:t>股全市场利润从 </a:t>
             </a:r>
             <a:r>
               <a:rPr lang="en-US" altLang="zh-CN" sz="1000" dirty="0" smtClean="0">
@@ -1794,7 +1776,7 @@
                 <a:latin typeface="微软雅黑" panose="020B0503020204020204" pitchFamily="34" charset="-122"/>
                 <a:ea typeface="微软雅黑" panose="020B0503020204020204" pitchFamily="34" charset="-122"/>
               </a:rPr>
-              <a:t xml:space="preserve">2.5 </a:t>
+              <a:t>2.5 </a:t>
             </a:r>
             <a:r>
               <a:rPr lang="zh-CN" altLang="en-US" sz="1000" dirty="0" smtClean="0">
@@ -1806,7 +1788,7 @@
                 <a:latin typeface="微软雅黑" panose="020B0503020204020204" pitchFamily="34" charset="-122"/>
                 <a:ea typeface="微软雅黑" panose="020B0503020204020204" pitchFamily="34" charset="-122"/>
               </a:rPr>
-              <a:t xml:space="preserve">万亿翻倍到 </a:t>
+              <a:t>万亿翻倍到 </a:t>
             </a:r>
             <a:r>
               <a:rPr lang="en-US" altLang="zh-CN" sz="1000" dirty="0" smtClean="0">
@@ -1818,7 +1800,7 @@
                 <a:latin typeface="微软雅黑" panose="020B0503020204020204" pitchFamily="34" charset="-122"/>
                 <a:ea typeface="微软雅黑" panose="020B0503020204020204" pitchFamily="34" charset="-122"/>
               </a:rPr>
-              <a:t xml:space="preserve">5.38 </a:t>
+              <a:t>5.38 </a:t>
             </a:r>
             <a:r>
               <a:rPr lang="zh-CN" altLang="en-US" sz="1000" dirty="0" smtClean="0">
@@ -1830,7 +1812,7 @@
                 <a:latin typeface="微软雅黑" panose="020B0503020204020204" pitchFamily="34" charset="-122"/>
                 <a:ea typeface="微软雅黑" panose="020B0503020204020204" pitchFamily="34" charset="-122"/>
               </a:rPr>
-              <a:t xml:space="preserve">万亿，但估值却从约 </a:t>
+              <a:t>万亿，但估值却从约 </a:t>
             </a:r>
             <a:r>
               <a:rPr lang="en-US" altLang="zh-CN" sz="1000" dirty="0" smtClean="0">
@@ -1842,7 +1824,7 @@
                 <a:latin typeface="微软雅黑" panose="020B0503020204020204" pitchFamily="34" charset="-122"/>
                 <a:ea typeface="微软雅黑" panose="020B0503020204020204" pitchFamily="34" charset="-122"/>
               </a:rPr>
-              <a:t xml:space="preserve">30 </a:t>
+              <a:t>30 </a:t>
             </a:r>
             <a:r>
               <a:rPr lang="zh-CN" altLang="en-US" sz="1000" dirty="0" smtClean="0">
@@ -1854,7 +1836,7 @@
                 <a:latin typeface="微软雅黑" panose="020B0503020204020204" pitchFamily="34" charset="-122"/>
                 <a:ea typeface="微软雅黑" panose="020B0503020204020204" pitchFamily="34" charset="-122"/>
               </a:rPr>
-              <a:t xml:space="preserve">倍压缩到 </a:t>
+              <a:t>倍压缩到 </a:t>
             </a:r>
             <a:r>
               <a:rPr lang="en-US" altLang="zh-CN" sz="1000" dirty="0" smtClean="0">
@@ -1866,7 +1848,7 @@
                 <a:latin typeface="微软雅黑" panose="020B0503020204020204" pitchFamily="34" charset="-122"/>
                 <a:ea typeface="微软雅黑" panose="020B0503020204020204" pitchFamily="34" charset="-122"/>
               </a:rPr>
-              <a:t xml:space="preserve">20-25 </a:t>
+              <a:t>20-25 </a:t>
             </a:r>
             <a:r>
               <a:rPr lang="zh-CN" altLang="en-US" sz="1000" dirty="0" smtClean="0">
@@ -1878,7 +1860,7 @@
                 <a:latin typeface="微软雅黑" panose="020B0503020204020204" pitchFamily="34" charset="-122"/>
                 <a:ea typeface="微软雅黑" panose="020B0503020204020204" pitchFamily="34" charset="-122"/>
               </a:rPr>
-              <a:t xml:space="preserve">倍，盈利增长被估值下修抵消。指数并非不向上，而是 </a:t>
+              <a:t>倍，盈利增长被估值下修抵消。指数并非不向上，而是 </a:t>
             </a:r>
             <a:r>
               <a:rPr lang="en-US" altLang="zh-CN" sz="1000" dirty="0" smtClean="0">
@@ -1890,7 +1872,7 @@
                 <a:latin typeface="微软雅黑" panose="020B0503020204020204" pitchFamily="34" charset="-122"/>
                 <a:ea typeface="微软雅黑" panose="020B0503020204020204" pitchFamily="34" charset="-122"/>
               </a:rPr>
-              <a:t xml:space="preserve">2015 </a:t>
+              <a:t>2015 </a:t>
             </a:r>
             <a:r>
               <a:rPr lang="zh-CN" altLang="en-US" sz="1000" dirty="0" smtClean="0">
@@ -1939,7 +1921,6 @@
           <a:bodyPr/>
           <a:lstStyle/>
           <a:p>
-            <a:pPr/>
             <a:r>
               <a:rPr lang="zh-CN" sz="1400" b="1" dirty="0">
                 <a:solidFill>
@@ -1973,44 +1954,32 @@
               <a:tblGrid>
                 <a:gridCol w="732367">
                   <a:extLst>
-                    <a:ext uri="{9D8B030D-6E8A-4147-A177-3AD203B41FA5}">
-                      <a16:colId val="1"/>
-                    </a:ext>
+                    <a:ext uri="{9D8B030D-6E8A-4147-A177-3AD203B41FA5}"/>
                   </a:extLst>
                 </a:gridCol>
                 <a:gridCol w="732367">
                   <a:extLst>
-                    <a:ext uri="{9D8B030D-6E8A-4147-A177-3AD203B41FA5}">
-                      <a16:colId val="2"/>
-                    </a:ext>
+                    <a:ext uri="{9D8B030D-6E8A-4147-A177-3AD203B41FA5}"/>
                   </a:extLst>
                 </a:gridCol>
                 <a:gridCol w="732367">
                   <a:extLst>
-                    <a:ext uri="{9D8B030D-6E8A-4147-A177-3AD203B41FA5}">
-                      <a16:colId val="3"/>
-                    </a:ext>
+                    <a:ext uri="{9D8B030D-6E8A-4147-A177-3AD203B41FA5}"/>
                   </a:extLst>
                 </a:gridCol>
                 <a:gridCol w="732367">
                   <a:extLst>
-                    <a:ext uri="{9D8B030D-6E8A-4147-A177-3AD203B41FA5}">
-                      <a16:colId val="4"/>
-                    </a:ext>
+                    <a:ext uri="{9D8B030D-6E8A-4147-A177-3AD203B41FA5}"/>
                   </a:extLst>
                 </a:gridCol>
                 <a:gridCol w="732367">
                   <a:extLst>
-                    <a:ext uri="{9D8B030D-6E8A-4147-A177-3AD203B41FA5}">
-                      <a16:colId val="5"/>
-                    </a:ext>
+                    <a:ext uri="{9D8B030D-6E8A-4147-A177-3AD203B41FA5}"/>
                   </a:extLst>
                 </a:gridCol>
                 <a:gridCol w="732367">
                   <a:extLst>
-                    <a:ext uri="{9D8B030D-6E8A-4147-A177-3AD203B41FA5}">
-                      <a16:colId val="6"/>
-                    </a:ext>
+                    <a:ext uri="{9D8B030D-6E8A-4147-A177-3AD203B41FA5}"/>
                   </a:extLst>
                 </a:gridCol>
               </a:tblGrid>
@@ -2292,9 +2261,7 @@
                   </a:tcPr>
                 </a:tc>
                 <a:extLst>
-                  <a:ext uri="{0D108BD9-81ED-4DB2-BD59-A6C34878D82A}">
-                    <a16:rowId val="1"/>
-                  </a:ext>
+                  <a:ext uri="{0D108BD9-81ED-4DB2-BD59-A6C34878D82A}"/>
                 </a:extLst>
               </a:tr>
               <a:tr h="492355">
@@ -2551,9 +2518,7 @@
                   </a:tcPr>
                 </a:tc>
                 <a:extLst>
-                  <a:ext uri="{0D108BD9-81ED-4DB2-BD59-A6C34878D82A}">
-                    <a16:rowId val="2"/>
-                  </a:ext>
+                  <a:ext uri="{0D108BD9-81ED-4DB2-BD59-A6C34878D82A}"/>
                 </a:extLst>
               </a:tr>
               <a:tr h="492355">
@@ -2828,9 +2793,7 @@
                   </a:tcPr>
                 </a:tc>
                 <a:extLst>
-                  <a:ext uri="{0D108BD9-81ED-4DB2-BD59-A6C34878D82A}">
-                    <a16:rowId val="3"/>
-                  </a:ext>
+                  <a:ext uri="{0D108BD9-81ED-4DB2-BD59-A6C34878D82A}"/>
                 </a:extLst>
               </a:tr>
               <a:tr h="492355">
@@ -3087,9 +3050,7 @@
                   </a:tcPr>
                 </a:tc>
                 <a:extLst>
-                  <a:ext uri="{0D108BD9-81ED-4DB2-BD59-A6C34878D82A}">
-                    <a16:rowId val="4"/>
-                  </a:ext>
+                  <a:ext uri="{0D108BD9-81ED-4DB2-BD59-A6C34878D82A}"/>
                 </a:extLst>
               </a:tr>
               <a:tr h="492355">
@@ -3364,9 +3325,7 @@
                   </a:tcPr>
                 </a:tc>
                 <a:extLst>
-                  <a:ext uri="{0D108BD9-81ED-4DB2-BD59-A6C34878D82A}">
-                    <a16:rowId val="5"/>
-                  </a:ext>
+                  <a:ext uri="{0D108BD9-81ED-4DB2-BD59-A6C34878D82A}"/>
                 </a:extLst>
               </a:tr>
               <a:tr h="492355">
@@ -3623,9 +3582,7 @@
                   </a:tcPr>
                 </a:tc>
                 <a:extLst>
-                  <a:ext uri="{0D108BD9-81ED-4DB2-BD59-A6C34878D82A}">
-                    <a16:rowId val="6"/>
-                  </a:ext>
+                  <a:ext uri="{0D108BD9-81ED-4DB2-BD59-A6C34878D82A}"/>
                 </a:extLst>
               </a:tr>
               <a:tr h="492355">
@@ -3900,9 +3857,7 @@
                   </a:tcPr>
                 </a:tc>
                 <a:extLst>
-                  <a:ext uri="{0D108BD9-81ED-4DB2-BD59-A6C34878D82A}">
-                    <a16:rowId val="7"/>
-                  </a:ext>
+                  <a:ext uri="{0D108BD9-81ED-4DB2-BD59-A6C34878D82A}"/>
                 </a:extLst>
               </a:tr>
             </a:tbl>
@@ -3918,11 +3873,11 @@
 </file>
 
 <file path=ppt/slides/slide10.xml><?xml version="1.0" encoding="utf-8"?>
-<p:sld xmlns:p="http://schemas.openxmlformats.org/presentationml/2006/main" xmlns:a="http://schemas.openxmlformats.org/drawingml/2006/main">
+<p:sld xmlns:a="http://schemas.openxmlformats.org/drawingml/2006/main" xmlns:r="http://schemas.openxmlformats.org/officeDocument/2006/relationships" xmlns:p="http://schemas.openxmlformats.org/presentationml/2006/main">
   <p:cSld>
     <p:spTree>
       <p:nvGrpSpPr>
-        <p:cNvPr id="27" name=""/>
+        <p:cNvPr id="1" name=""/>
         <p:cNvGrpSpPr/>
         <p:nvPr/>
       </p:nvGrpSpPr>
@@ -3957,7 +3912,6 @@
           <a:bodyPr/>
           <a:lstStyle/>
           <a:p>
-            <a:pPr/>
             <a:r>
               <a:rPr lang="zh-CN" sz="2100" b="1">
                 <a:solidFill>
@@ -4017,7 +3971,6 @@
           <a:bodyPr/>
           <a:lstStyle/>
           <a:p>
-            <a:pPr/>
             <a:endParaRPr/>
           </a:p>
         </p:txBody>
@@ -4045,7 +3998,6 @@
           <a:bodyPr/>
           <a:lstStyle/>
           <a:p>
-            <a:pPr/>
             <a:r>
               <a:rPr lang="zh-CN" sz="2000" b="1">
                 <a:solidFill>
@@ -4083,7 +4035,6 @@
           <a:bodyPr/>
           <a:lstStyle/>
           <a:p>
-            <a:pPr/>
             <a:r>
               <a:rPr lang="zh-CN" sz="2000" b="1" dirty="0">
                 <a:solidFill>
@@ -4123,7 +4074,6 @@
           <a:bodyPr/>
           <a:lstStyle/>
           <a:p>
-            <a:pPr/>
             <a:endParaRPr sz="3200"/>
           </a:p>
         </p:txBody>
@@ -4151,7 +4101,6 @@
           <a:bodyPr/>
           <a:lstStyle/>
           <a:p>
-            <a:pPr/>
             <a:r>
               <a:rPr lang="zh-CN" sz="2000" b="1">
                 <a:solidFill>
@@ -4189,7 +4138,6 @@
           <a:bodyPr/>
           <a:lstStyle/>
           <a:p>
-            <a:pPr/>
             <a:r>
               <a:rPr lang="zh-CN" sz="1400" b="1">
                 <a:solidFill>
@@ -4227,7 +4175,6 @@
           <a:bodyPr/>
           <a:lstStyle/>
           <a:p>
-            <a:pPr/>
             <a:r>
               <a:rPr lang="zh-CN" sz="1200" dirty="0">
                 <a:latin typeface="Microsoft YaHei"/>
@@ -4292,7 +4239,6 @@
           <a:bodyPr/>
           <a:lstStyle/>
           <a:p>
-            <a:pPr/>
             <a:endParaRPr sz="3200"/>
           </a:p>
         </p:txBody>
@@ -4322,7 +4268,6 @@
           <a:bodyPr/>
           <a:lstStyle/>
           <a:p>
-            <a:pPr/>
             <a:endParaRPr sz="3200"/>
           </a:p>
         </p:txBody>
@@ -4352,7 +4297,6 @@
           <a:bodyPr/>
           <a:lstStyle/>
           <a:p>
-            <a:pPr/>
             <a:endParaRPr sz="3200"/>
           </a:p>
         </p:txBody>
@@ -4380,7 +4324,6 @@
           <a:bodyPr/>
           <a:lstStyle/>
           <a:p>
-            <a:pPr/>
             <a:r>
               <a:rPr lang="zh-CN" sz="2000" b="1">
                 <a:solidFill>
@@ -4418,7 +4361,6 @@
           <a:bodyPr/>
           <a:lstStyle/>
           <a:p>
-            <a:pPr/>
             <a:r>
               <a:rPr lang="zh-CN" sz="1400" b="1">
                 <a:solidFill>
@@ -4456,7 +4398,6 @@
           <a:bodyPr/>
           <a:lstStyle/>
           <a:p>
-            <a:pPr/>
             <a:r>
               <a:rPr lang="zh-CN" sz="1200" dirty="0">
                 <a:latin typeface="Microsoft YaHei"/>
@@ -4507,7 +4448,6 @@
           <a:bodyPr/>
           <a:lstStyle/>
           <a:p>
-            <a:pPr/>
             <a:endParaRPr sz="3200"/>
           </a:p>
         </p:txBody>
@@ -4535,7 +4475,6 @@
           <a:bodyPr/>
           <a:lstStyle/>
           <a:p>
-            <a:pPr/>
             <a:r>
               <a:rPr lang="zh-CN" sz="2000" b="1">
                 <a:solidFill>
@@ -4573,7 +4512,6 @@
           <a:bodyPr/>
           <a:lstStyle/>
           <a:p>
-            <a:pPr/>
             <a:r>
               <a:rPr lang="zh-CN" sz="1400" b="1">
                 <a:solidFill>
@@ -4611,7 +4549,6 @@
           <a:bodyPr/>
           <a:lstStyle/>
           <a:p>
-            <a:pPr/>
             <a:r>
               <a:rPr lang="zh-CN" sz="1200" dirty="0" smtClean="0">
                 <a:latin typeface="Microsoft YaHei"/>
@@ -4655,7 +4592,6 @@
           <a:bodyPr/>
           <a:lstStyle/>
           <a:p>
-            <a:pPr/>
             <a:endParaRPr sz="3200"/>
           </a:p>
         </p:txBody>
@@ -4685,7 +4621,6 @@
           <a:bodyPr/>
           <a:lstStyle/>
           <a:p>
-            <a:pPr/>
             <a:endParaRPr sz="3200"/>
           </a:p>
         </p:txBody>
@@ -4715,7 +4650,6 @@
           <a:bodyPr/>
           <a:lstStyle/>
           <a:p>
-            <a:pPr/>
             <a:endParaRPr sz="3200"/>
           </a:p>
         </p:txBody>
@@ -4743,7 +4677,6 @@
           <a:bodyPr/>
           <a:lstStyle/>
           <a:p>
-            <a:pPr/>
             <a:r>
               <a:rPr lang="zh-CN" sz="2000" b="1">
                 <a:solidFill>
@@ -4781,7 +4714,6 @@
           <a:bodyPr/>
           <a:lstStyle/>
           <a:p>
-            <a:pPr/>
             <a:r>
               <a:rPr lang="zh-CN" sz="1400" b="1">
                 <a:solidFill>
@@ -4819,7 +4751,6 @@
           <a:bodyPr/>
           <a:lstStyle/>
           <a:p>
-            <a:pPr/>
             <a:r>
               <a:rPr lang="zh-CN" sz="1200" dirty="0">
                 <a:latin typeface="Microsoft YaHei"/>
@@ -4856,7 +4787,6 @@
           <a:bodyPr/>
           <a:lstStyle/>
           <a:p>
-            <a:pPr/>
             <a:endParaRPr sz="3200"/>
           </a:p>
         </p:txBody>
@@ -4884,7 +4814,6 @@
           <a:bodyPr/>
           <a:lstStyle/>
           <a:p>
-            <a:pPr/>
             <a:r>
               <a:rPr lang="zh-CN" sz="2000" b="1">
                 <a:solidFill>
@@ -4922,7 +4851,6 @@
           <a:bodyPr/>
           <a:lstStyle/>
           <a:p>
-            <a:pPr/>
             <a:r>
               <a:rPr lang="zh-CN" sz="1400" b="1">
                 <a:solidFill>
@@ -4960,7 +4888,6 @@
           <a:bodyPr/>
           <a:lstStyle/>
           <a:p>
-            <a:pPr/>
             <a:r>
               <a:rPr lang="zh-CN" sz="1200" dirty="0">
                 <a:latin typeface="Microsoft YaHei"/>
@@ -4997,7 +4924,6 @@
           <a:bodyPr/>
           <a:lstStyle/>
           <a:p>
-            <a:pPr/>
             <a:endParaRPr sz="3200"/>
           </a:p>
         </p:txBody>
@@ -5027,7 +4953,6 @@
           <a:bodyPr/>
           <a:lstStyle/>
           <a:p>
-            <a:pPr/>
             <a:endParaRPr sz="3200"/>
           </a:p>
         </p:txBody>
@@ -5057,7 +4982,6 @@
           <a:bodyPr/>
           <a:lstStyle/>
           <a:p>
-            <a:pPr/>
             <a:endParaRPr sz="3200"/>
           </a:p>
         </p:txBody>
@@ -5085,7 +5009,6 @@
           <a:bodyPr/>
           <a:lstStyle/>
           <a:p>
-            <a:pPr/>
             <a:r>
               <a:rPr lang="zh-CN" sz="2000" b="1">
                 <a:solidFill>
@@ -5123,7 +5046,6 @@
           <a:bodyPr/>
           <a:lstStyle/>
           <a:p>
-            <a:pPr/>
             <a:r>
               <a:rPr lang="zh-CN" sz="1400" b="1">
                 <a:solidFill>
@@ -5161,7 +5083,6 @@
           <a:bodyPr/>
           <a:lstStyle/>
           <a:p>
-            <a:pPr/>
             <a:r>
               <a:rPr lang="zh-CN" sz="1200" dirty="0">
                 <a:latin typeface="Microsoft YaHei"/>
@@ -5198,7 +5119,6 @@
           <a:bodyPr/>
           <a:lstStyle/>
           <a:p>
-            <a:pPr/>
             <a:endParaRPr sz="3200"/>
           </a:p>
         </p:txBody>
@@ -5226,7 +5146,6 @@
           <a:bodyPr/>
           <a:lstStyle/>
           <a:p>
-            <a:pPr/>
             <a:r>
               <a:rPr lang="zh-CN" sz="2000" b="1">
                 <a:solidFill>
@@ -5264,7 +5183,6 @@
           <a:bodyPr/>
           <a:lstStyle/>
           <a:p>
-            <a:pPr/>
             <a:r>
               <a:rPr lang="zh-CN" sz="1400" b="1">
                 <a:solidFill>
@@ -5302,7 +5220,6 @@
           <a:bodyPr/>
           <a:lstStyle/>
           <a:p>
-            <a:pPr/>
             <a:r>
               <a:rPr lang="zh-CN" sz="1200" dirty="0">
                 <a:latin typeface="Microsoft YaHei"/>
@@ -5339,7 +5256,6 @@
           <a:bodyPr/>
           <a:lstStyle/>
           <a:p>
-            <a:pPr/>
             <a:endParaRPr sz="3200"/>
           </a:p>
         </p:txBody>
@@ -5369,7 +5285,6 @@
           <a:bodyPr/>
           <a:lstStyle/>
           <a:p>
-            <a:pPr/>
             <a:endParaRPr sz="3200"/>
           </a:p>
         </p:txBody>
@@ -5399,7 +5314,6 @@
           <a:bodyPr/>
           <a:lstStyle/>
           <a:p>
-            <a:pPr/>
             <a:endParaRPr sz="3200"/>
           </a:p>
         </p:txBody>
@@ -5427,7 +5341,6 @@
           <a:bodyPr/>
           <a:lstStyle/>
           <a:p>
-            <a:pPr/>
             <a:r>
               <a:rPr lang="zh-CN" sz="2000" b="1">
                 <a:solidFill>
@@ -5465,7 +5378,6 @@
           <a:bodyPr/>
           <a:lstStyle/>
           <a:p>
-            <a:pPr/>
             <a:r>
               <a:rPr lang="zh-CN" sz="1400" b="1">
                 <a:solidFill>
@@ -5503,7 +5415,6 @@
           <a:bodyPr/>
           <a:lstStyle/>
           <a:p>
-            <a:pPr/>
             <a:r>
               <a:rPr lang="zh-CN" sz="1200" dirty="0">
                 <a:latin typeface="Microsoft YaHei"/>
@@ -5524,11 +5435,11 @@
 </file>
 
 <file path=ppt/slides/slide2.xml><?xml version="1.0" encoding="utf-8"?>
-<p:sld xmlns:r="http://schemas.openxmlformats.org/officeDocument/2006/relationships" xmlns:p="http://schemas.openxmlformats.org/presentationml/2006/main" xmlns:a="http://schemas.openxmlformats.org/drawingml/2006/main">
+<p:sld xmlns:a="http://schemas.openxmlformats.org/drawingml/2006/main" xmlns:r="http://schemas.openxmlformats.org/officeDocument/2006/relationships" xmlns:p="http://schemas.openxmlformats.org/presentationml/2006/main">
   <p:cSld>
     <p:spTree>
       <p:nvGrpSpPr>
-        <p:cNvPr id="72" name=""/>
+        <p:cNvPr id="1" name=""/>
         <p:cNvGrpSpPr/>
         <p:nvPr/>
       </p:nvGrpSpPr>
@@ -5651,7 +5562,6 @@
           <a:bodyPr/>
           <a:lstStyle/>
           <a:p>
-            <a:pPr/>
             <a:endParaRPr/>
           </a:p>
         </p:txBody>
@@ -5692,13 +5602,6 @@
               </a:rPr>
               <a:t>数据来源：数据截至 2026-10-16；"全A成交额"以中证全指成分股成交额合计近似；缩量为恐慌底当日成交额较其前 60 个交易日量能高点的降幅；反弹为恐慌底后 60 个交易日区间涨跌幅（贸易战为 120 日）。历史表现不预示未来，不构成投资建议。</a:t>
             </a:r>
-            <a:endParaRPr lang="zh-CN" sz="825" dirty="0" smtClean="0">
-              <a:solidFill>
-                <a:srgbClr val="8A8A8A"/>
-              </a:solidFill>
-              <a:latin typeface="Microsoft YaHei"/>
-              <a:ea typeface="Microsoft YaHei"/>
-            </a:endParaRPr>
           </a:p>
         </p:txBody>
       </p:sp>
@@ -5725,7 +5628,6 @@
           <a:bodyPr/>
           <a:lstStyle/>
           <a:p>
-            <a:pPr/>
             <a:endParaRPr/>
           </a:p>
         </p:txBody>
@@ -5774,7 +5676,6 @@
           <a:bodyPr/>
           <a:lstStyle/>
           <a:p>
-            <a:pPr/>
             <a:endParaRPr/>
           </a:p>
         </p:txBody>
@@ -5813,112 +5714,17 @@
               </a:rPr>
               <a:t>疫情恐慌、2022 市场底、924 政策底、贸易战、美伊战争——五次恐慌底先缩量、后反弹，中证全指全收益均获正涨幅。</a:t>
             </a:r>
-            <a:endParaRPr lang="zh-CN" altLang="en-US" sz="1200" b="1" dirty="0" smtClean="0">
-              <a:solidFill>
-                <a:srgbClr val="061F32"/>
-              </a:solidFill>
-              <a:latin typeface="Microsoft YaHei"/>
-              <a:ea typeface="Microsoft YaHei"/>
-            </a:endParaRPr>
-          </a:p>
-        </p:txBody>
-      </p:sp>
-      <p:sp>
-        <p:nvSpPr>
-          <p:cNvPr id="79" name="文本框 18" descr="{&quot;isTemplate&quot;:true,&quot;type&quot;:&quot;text&quot;}"/>
-          <p:cNvSpPr txBox="1"/>
-          <p:nvPr/>
-        </p:nvSpPr>
-        <p:spPr>
-          <a:xfrm>
-            <a:off x="10540146" y="1060939"/>
-            <a:ext cx="752475" cy="266700"/>
-          </a:xfrm>
-          <a:prstGeom prst="rect">
-            <a:avLst/>
-          </a:prstGeom>
-        </p:spPr>
-        <p:txBody>
-          <a:bodyPr wrap="none" lIns="0" tIns="0" rIns="0" bIns="0"/>
-          <a:lstStyle/>
-          <a:p>
-            <a:pPr>
-              <a:lnSpc>
-                <a:spcPct val="100000"/>
-              </a:lnSpc>
-            </a:pPr>
-            <a:r>
-              <a:rPr lang="zh-CN" sz="1725" b="1" dirty="0">
-                <a:solidFill>
-                  <a:srgbClr val="C0392B"/>
-                </a:solidFill>
-                <a:latin typeface="Microsoft YaHei"/>
-                <a:ea typeface="Microsoft YaHei"/>
-              </a:rPr>
-              <a:t>5/5</a:t>
-            </a:r>
-            <a:endParaRPr lang="en-US" sz="1725" b="1" dirty="0">
-              <a:solidFill>
-                <a:srgbClr val="C0392B"/>
-              </a:solidFill>
-              <a:latin typeface="Microsoft YaHei"/>
-              <a:ea typeface="Microsoft YaHei"/>
-            </a:endParaRPr>
-          </a:p>
-        </p:txBody>
-      </p:sp>
-      <p:sp>
-        <p:nvSpPr>
-          <p:cNvPr id="80" name="文本框 19" descr="{&quot;isTemplate&quot;:true,&quot;type&quot;:&quot;text&quot;}"/>
-          <p:cNvSpPr txBox="1"/>
-          <p:nvPr/>
-        </p:nvSpPr>
-        <p:spPr>
-          <a:xfrm>
-            <a:off x="10646386" y="1350352"/>
-            <a:ext cx="704850" cy="133350"/>
-          </a:xfrm>
-          <a:prstGeom prst="rect">
-            <a:avLst/>
-          </a:prstGeom>
-        </p:spPr>
-        <p:txBody>
-          <a:bodyPr wrap="none" lIns="0" tIns="0" rIns="0" bIns="0"/>
-          <a:lstStyle/>
-          <a:p>
-            <a:pPr>
-              <a:lnSpc>
-                <a:spcPct val="100000"/>
-              </a:lnSpc>
-            </a:pPr>
-            <a:r>
-              <a:rPr lang="zh-CN" sz="863" dirty="0">
-                <a:solidFill>
-                  <a:srgbClr val="8A8A8A"/>
-                </a:solidFill>
-                <a:latin typeface="Microsoft YaHei"/>
-                <a:ea typeface="Microsoft YaHei"/>
-              </a:rPr>
-              <a:t>恐慌底后反弹</a:t>
-            </a:r>
-            <a:endParaRPr lang="zh-CN" sz="863" dirty="0">
-              <a:solidFill>
-                <a:srgbClr val="8A8A8A"/>
-              </a:solidFill>
-              <a:latin typeface="Microsoft YaHei"/>
-              <a:ea typeface="Microsoft YaHei"/>
-            </a:endParaRPr>
           </a:p>
         </p:txBody>
       </p:sp>
       <p:pic>
         <p:nvPicPr>
-          <p:cNvPr id="81" name=""/>
+          <p:cNvPr id="81" name="图片 80"/>
           <p:cNvPicPr/>
           <p:nvPr/>
         </p:nvPicPr>
         <p:blipFill>
-          <a:blip r:embed="rId1"/>
+          <a:blip r:embed="rId2"/>
           <a:stretch/>
         </p:blipFill>
         <p:spPr>
@@ -5926,9 +5732,119 @@
             <a:off x="965200" y="1612900"/>
             <a:ext cx="9904845" cy="4737100"/>
           </a:xfrm>
-          <a:prstGeom prst="rect"/>
+          <a:prstGeom prst="rect">
+            <a:avLst/>
+          </a:prstGeom>
         </p:spPr>
       </p:pic>
+      <p:sp>
+        <p:nvSpPr>
+          <p:cNvPr id="2" name="左箭头 1"/>
+          <p:cNvSpPr/>
+          <p:nvPr/>
+        </p:nvSpPr>
+        <p:spPr>
+          <a:xfrm rot="19087418">
+            <a:off x="9725365" y="2867590"/>
+            <a:ext cx="1000125" cy="248736"/>
+          </a:xfrm>
+          <a:prstGeom prst="leftArrow">
+            <a:avLst/>
+          </a:prstGeom>
+          <a:solidFill>
+            <a:srgbClr val="00B050"/>
+          </a:solidFill>
+        </p:spPr>
+        <p:style>
+          <a:lnRef idx="2">
+            <a:schemeClr val="accent1">
+              <a:shade val="50000"/>
+            </a:schemeClr>
+          </a:lnRef>
+          <a:fillRef idx="1">
+            <a:schemeClr val="accent1"/>
+          </a:fillRef>
+          <a:effectRef idx="0">
+            <a:schemeClr val="accent1"/>
+          </a:effectRef>
+          <a:fontRef idx="minor">
+            <a:schemeClr val="lt1"/>
+          </a:fontRef>
+        </p:style>
+        <p:txBody>
+          <a:bodyPr rtlCol="0" anchor="ctr"/>
+          <a:lstStyle/>
+          <a:p>
+            <a:pPr algn="ctr"/>
+            <a:endParaRPr lang="zh-CN" altLang="en-US"/>
+          </a:p>
+        </p:txBody>
+      </p:sp>
+      <p:sp>
+        <p:nvSpPr>
+          <p:cNvPr id="3" name="矩形 2"/>
+          <p:cNvSpPr/>
+          <p:nvPr/>
+        </p:nvSpPr>
+        <p:spPr>
+          <a:xfrm>
+            <a:off x="10293529" y="2142365"/>
+            <a:ext cx="1593671" cy="461665"/>
+          </a:xfrm>
+          <a:prstGeom prst="rect">
+            <a:avLst/>
+          </a:prstGeom>
+        </p:spPr>
+        <p:txBody>
+          <a:bodyPr wrap="square">
+            <a:spAutoFit/>
+          </a:bodyPr>
+          <a:lstStyle/>
+          <a:p>
+            <a:r>
+              <a:rPr lang="zh-CN" altLang="en-US" sz="1200" b="1" dirty="0" smtClean="0">
+                <a:solidFill>
+                  <a:srgbClr val="061F32"/>
+                </a:solidFill>
+                <a:latin typeface="Microsoft YaHei"/>
+                <a:ea typeface="Microsoft YaHei"/>
+              </a:rPr>
+              <a:t>截止</a:t>
+            </a:r>
+            <a:r>
+              <a:rPr lang="en-US" altLang="zh-CN" sz="1200" b="1" dirty="0" smtClean="0">
+                <a:solidFill>
+                  <a:srgbClr val="061F32"/>
+                </a:solidFill>
+                <a:latin typeface="Microsoft YaHei"/>
+                <a:ea typeface="Microsoft YaHei"/>
+              </a:rPr>
+              <a:t>9.30</a:t>
+            </a:r>
+            <a:r>
+              <a:rPr lang="zh-CN" altLang="en-US" sz="1200" b="1" dirty="0" smtClean="0">
+                <a:solidFill>
+                  <a:srgbClr val="061F32"/>
+                </a:solidFill>
+                <a:latin typeface="Microsoft YaHei"/>
+                <a:ea typeface="Microsoft YaHei"/>
+              </a:rPr>
+              <a:t>成交额相较高点缩量</a:t>
+            </a:r>
+            <a:r>
+              <a:rPr lang="en-US" altLang="zh-CN" sz="1200" b="1" dirty="0" smtClean="0">
+                <a:solidFill>
+                  <a:srgbClr val="061F32"/>
+                </a:solidFill>
+                <a:latin typeface="Microsoft YaHei"/>
+                <a:ea typeface="Microsoft YaHei"/>
+              </a:rPr>
+              <a:t>62.21%</a:t>
+            </a:r>
+            <a:endParaRPr lang="zh-CN" altLang="en-US" sz="1200" dirty="0"/>
+          </a:p>
+        </p:txBody>
+      </p:sp>
     </p:spTree>
   </p:cSld>
   <p:clrMapOvr>
@@ -5938,11 +5854,11 @@
 </file>
 
 <file path=ppt/slides/slide3.xml><?xml version="1.0" encoding="utf-8"?>
-<p:sld xmlns:r="http://schemas.openxmlformats.org/officeDocument/2006/relationships" xmlns:p="http://schemas.openxmlformats.org/presentationml/2006/main" xmlns:a="http://schemas.openxmlformats.org/drawingml/2006/main">
+<p:sld xmlns:a="http://schemas.openxmlformats.org/drawingml/2006/main" xmlns:r="http://schemas.openxmlformats.org/officeDocument/2006/relationships" xmlns:p="http://schemas.openxmlformats.org/presentationml/2006/main">
   <p:cSld>
     <p:spTree>
       <p:nvGrpSpPr>
-        <p:cNvPr id="82" name=""/>
+        <p:cNvPr id="1" name=""/>
         <p:cNvGrpSpPr/>
         <p:nvPr/>
       </p:nvGrpSpPr>
@@ -5977,7 +5893,6 @@
           <a:bodyPr/>
           <a:lstStyle/>
           <a:p>
-            <a:pPr/>
             <a:endParaRPr/>
           </a:p>
         </p:txBody>
@@ -6104,7 +6019,7 @@
                 <a:latin typeface="Microsoft YaHei"/>
                 <a:ea typeface="Microsoft YaHei"/>
               </a:rPr>
-              <a:t xml:space="preserve"> </a:t>
+              <a:t> </a:t>
             </a:r>
             <a:r>
               <a:rPr lang="en-US" sz="2100" b="1" dirty="0">
@@ -6147,7 +6062,6 @@
           <a:bodyPr/>
           <a:lstStyle/>
           <a:p>
-            <a:pPr/>
             <a:endParaRPr/>
           </a:p>
         </p:txBody>
@@ -6161,7 +6075,7 @@
           <p:nvPr/>
         </p:nvPicPr>
         <p:blipFill>
-          <a:blip r:embed="rId1"/>
+          <a:blip r:embed="rId2"/>
           <a:srcRect l="4" r="4"/>
           <a:stretch>
             <a:fillRect/>
@@ -6201,7 +6115,6 @@
           <a:bodyPr/>
           <a:lstStyle/>
           <a:p>
-            <a:pPr/>
             <a:endParaRPr/>
           </a:p>
         </p:txBody>
@@ -6250,7 +6163,6 @@
           <a:bodyPr/>
           <a:lstStyle/>
           <a:p>
-            <a:pPr/>
             <a:endParaRPr/>
           </a:p>
         </p:txBody>
@@ -6563,7 +6475,7 @@
                 <a:latin typeface="Microsoft YaHei"/>
                 <a:ea typeface="Microsoft YaHei"/>
               </a:rPr>
-              <a:t xml:space="preserve"> 2026-10-16</a:t>
+              <a:t> 2026-10-16</a:t>
             </a:r>
             <a:r>
               <a:rPr lang="zh-CN" sz="825" dirty="0">
@@ -6658,11 +6570,11 @@
 </file>
 
 <file path=ppt/slides/slide4.xml><?xml version="1.0" encoding="utf-8"?>
-<p:sld xmlns:p="http://schemas.openxmlformats.org/presentationml/2006/main" xmlns:a="http://schemas.openxmlformats.org/drawingml/2006/main">
+<p:sld xmlns:a="http://schemas.openxmlformats.org/drawingml/2006/main" xmlns:r="http://schemas.openxmlformats.org/officeDocument/2006/relationships" xmlns:p="http://schemas.openxmlformats.org/presentationml/2006/main">
   <p:cSld>
     <p:spTree>
       <p:nvGrpSpPr>
-        <p:cNvPr id="93" name=""/>
+        <p:cNvPr id="1" name=""/>
         <p:cNvGrpSpPr/>
         <p:nvPr/>
       </p:nvGrpSpPr>
@@ -6697,7 +6609,6 @@
           <a:bodyPr/>
           <a:lstStyle/>
           <a:p>
-            <a:pPr/>
             <a:r>
               <a:rPr lang="zh-CN" altLang="en-US" sz="2100" b="1" dirty="0">
                 <a:solidFill>
@@ -6797,7 +6708,6 @@
           <a:bodyPr/>
           <a:lstStyle/>
           <a:p>
-            <a:pPr/>
             <a:endParaRPr/>
           </a:p>
         </p:txBody>
@@ -6861,7 +6771,6 @@
           <a:bodyPr/>
           <a:lstStyle/>
           <a:p>
-            <a:pPr/>
             <a:endParaRPr/>
           </a:p>
         </p:txBody>
@@ -7004,7 +6913,7 @@
                 <a:latin typeface="Microsoft YaHei"/>
                 <a:ea typeface="Microsoft YaHei"/>
               </a:rPr>
-              <a:t xml:space="preserve">证全指 </a:t>
+              <a:t>证全指 </a:t>
             </a:r>
             <a:r>
               <a:rPr lang="en-US" altLang="zh-CN" sz="1200" b="1" dirty="0" smtClean="0">
@@ -7135,7 +7044,6 @@
           <a:bodyPr/>
           <a:lstStyle/>
           <a:p>
-            <a:pPr/>
             <a:r>
               <a:rPr lang="zh-CN" sz="800" dirty="0">
                 <a:solidFill>
@@ -7193,7 +7101,6 @@
           <a:bodyPr/>
           <a:lstStyle/>
           <a:p>
-            <a:pPr/>
             <a:r>
               <a:rPr lang="zh-CN" sz="1400" b="1" dirty="0">
                 <a:solidFill>
@@ -7281,7 +7188,6 @@
           <a:bodyPr/>
           <a:lstStyle/>
           <a:p>
-            <a:pPr/>
             <a:endParaRPr sz="2000"/>
           </a:p>
         </p:txBody>
@@ -7309,7 +7215,6 @@
           <a:bodyPr/>
           <a:lstStyle/>
           <a:p>
-            <a:pPr/>
             <a:r>
               <a:rPr lang="zh-CN" sz="1200" b="1">
                 <a:solidFill>
@@ -7353,7 +7258,6 @@
           <a:bodyPr/>
           <a:lstStyle/>
           <a:p>
-            <a:pPr/>
             <a:endParaRPr sz="2000"/>
           </a:p>
         </p:txBody>
@@ -7381,7 +7285,6 @@
           <a:bodyPr/>
           <a:lstStyle/>
           <a:p>
-            <a:pPr/>
             <a:r>
               <a:rPr lang="zh-CN" sz="1050" b="1" dirty="0">
                 <a:solidFill>
@@ -7419,7 +7322,6 @@
           <a:bodyPr/>
           <a:lstStyle/>
           <a:p>
-            <a:pPr/>
             <a:r>
               <a:rPr lang="zh-CN" sz="1050" b="1">
                 <a:solidFill>
@@ -7457,7 +7359,6 @@
           <a:bodyPr/>
           <a:lstStyle/>
           <a:p>
-            <a:pPr/>
             <a:r>
               <a:rPr lang="zh-CN" sz="900" dirty="0">
                 <a:solidFill>
@@ -7497,7 +7398,6 @@
           <a:bodyPr/>
           <a:lstStyle/>
           <a:p>
-            <a:pPr/>
             <a:endParaRPr sz="2000"/>
           </a:p>
         </p:txBody>
@@ -7525,7 +7425,6 @@
           <a:bodyPr/>
           <a:lstStyle/>
           <a:p>
-            <a:pPr/>
             <a:r>
               <a:rPr lang="zh-CN" sz="1050" b="1">
                 <a:solidFill>
@@ -7563,7 +7462,6 @@
           <a:bodyPr/>
           <a:lstStyle/>
           <a:p>
-            <a:pPr/>
             <a:r>
               <a:rPr lang="zh-CN" sz="1050" b="1">
                 <a:solidFill>
@@ -7601,7 +7499,6 @@
           <a:bodyPr/>
           <a:lstStyle/>
           <a:p>
-            <a:pPr/>
             <a:r>
               <a:rPr lang="zh-CN" sz="900">
                 <a:solidFill>
@@ -7643,7 +7540,6 @@
           <a:bodyPr/>
           <a:lstStyle/>
           <a:p>
-            <a:pPr/>
             <a:endParaRPr sz="2000"/>
           </a:p>
         </p:txBody>
@@ -7671,7 +7567,6 @@
           <a:bodyPr/>
           <a:lstStyle/>
           <a:p>
-            <a:pPr/>
             <a:r>
               <a:rPr lang="zh-CN" sz="1050" b="1">
                 <a:solidFill>
@@ -7709,7 +7604,6 @@
           <a:bodyPr/>
           <a:lstStyle/>
           <a:p>
-            <a:pPr/>
             <a:r>
               <a:rPr lang="zh-CN" sz="1050" b="1">
                 <a:solidFill>
@@ -7747,7 +7641,6 @@
           <a:bodyPr/>
           <a:lstStyle/>
           <a:p>
-            <a:pPr/>
             <a:r>
               <a:rPr lang="zh-CN" sz="900">
                 <a:solidFill>
@@ -7789,7 +7682,6 @@
           <a:bodyPr/>
           <a:lstStyle/>
           <a:p>
-            <a:pPr/>
             <a:endParaRPr sz="2000"/>
           </a:p>
         </p:txBody>
@@ -7817,7 +7709,6 @@
           <a:bodyPr/>
           <a:lstStyle/>
           <a:p>
-            <a:pPr/>
             <a:r>
               <a:rPr lang="zh-CN" sz="1050" b="1">
                 <a:solidFill>
@@ -7855,7 +7746,6 @@
           <a:bodyPr/>
           <a:lstStyle/>
           <a:p>
-            <a:pPr/>
             <a:r>
               <a:rPr lang="zh-CN" sz="1050" b="1" dirty="0">
                 <a:solidFill>
@@ -7929,7 +7819,6 @@
           <a:bodyPr/>
           <a:lstStyle/>
           <a:p>
-            <a:pPr/>
             <a:r>
               <a:rPr lang="zh-CN" sz="900">
                 <a:solidFill>
@@ -7971,7 +7860,6 @@
           <a:bodyPr/>
           <a:lstStyle/>
           <a:p>
-            <a:pPr/>
             <a:endParaRPr sz="2000"/>
           </a:p>
         </p:txBody>
@@ -7999,7 +7887,6 @@
           <a:bodyPr/>
           <a:lstStyle/>
           <a:p>
-            <a:pPr/>
             <a:r>
               <a:rPr lang="zh-CN" sz="1050" b="1">
                 <a:solidFill>
@@ -8041,7 +7928,6 @@
           <a:bodyPr/>
           <a:lstStyle/>
           <a:p>
-            <a:pPr/>
             <a:endParaRPr sz="2000"/>
           </a:p>
         </p:txBody>
@@ -8069,7 +7955,6 @@
           <a:bodyPr/>
           <a:lstStyle/>
           <a:p>
-            <a:pPr/>
             <a:r>
               <a:rPr lang="zh-CN" sz="1050" b="1">
                 <a:solidFill>
@@ -8111,7 +7996,6 @@
           <a:bodyPr/>
           <a:lstStyle/>
           <a:p>
-            <a:pPr/>
             <a:endParaRPr sz="2000"/>
           </a:p>
         </p:txBody>
@@ -8139,7 +8023,6 @@
           <a:bodyPr/>
           <a:lstStyle/>
           <a:p>
-            <a:pPr/>
             <a:r>
               <a:rPr lang="zh-CN" sz="1000" dirty="0">
                 <a:latin typeface="Microsoft YaHei"/>
@@ -8188,7 +8071,6 @@
           <a:bodyPr/>
           <a:lstStyle/>
           <a:p>
-            <a:pPr/>
             <a:r>
               <a:rPr lang="zh-CN" sz="1050" b="1">
                 <a:solidFill>
@@ -8230,7 +8112,6 @@
           <a:bodyPr/>
           <a:lstStyle/>
           <a:p>
-            <a:pPr/>
             <a:endParaRPr sz="2000"/>
           </a:p>
         </p:txBody>
@@ -8258,7 +8139,6 @@
           <a:bodyPr/>
           <a:lstStyle/>
           <a:p>
-            <a:pPr/>
             <a:r>
               <a:rPr lang="zh-CN" sz="1000" dirty="0" smtClean="0">
                 <a:latin typeface="Microsoft YaHei"/>
@@ -8276,7 +8156,6 @@
             <a:endParaRPr/>
           </a:p>
           <a:p>
-            <a:pPr/>
             <a:endParaRPr sz="2000" dirty="0"/>
           </a:p>
         </p:txBody>
@@ -8304,7 +8183,6 @@
           <a:bodyPr/>
           <a:lstStyle/>
           <a:p>
-            <a:pPr/>
             <a:r>
               <a:rPr lang="zh-CN" sz="1050" b="1">
                 <a:solidFill>
@@ -8344,7 +8222,6 @@
           <a:bodyPr/>
           <a:lstStyle/>
           <a:p>
-            <a:pPr/>
             <a:endParaRPr sz="2000"/>
           </a:p>
         </p:txBody>
@@ -8372,7 +8249,6 @@
           <a:bodyPr/>
           <a:lstStyle/>
           <a:p>
-            <a:pPr/>
             <a:r>
               <a:rPr lang="zh-CN" sz="1000" dirty="0">
                 <a:solidFill>
@@ -8406,7 +8282,6 @@
             <a:endParaRPr/>
           </a:p>
           <a:p>
-            <a:pPr/>
             <a:r>
               <a:rPr lang="zh-CN" sz="1000" dirty="0" smtClean="0">
                 <a:solidFill>
@@ -8444,7 +8319,6 @@
           <a:bodyPr/>
           <a:lstStyle/>
           <a:p>
-            <a:pPr/>
             <a:r>
               <a:rPr lang="zh-CN" sz="1050" b="1">
                 <a:solidFill>
@@ -8484,7 +8358,6 @@
           <a:bodyPr/>
           <a:lstStyle/>
           <a:p>
-            <a:pPr/>
             <a:endParaRPr sz="2000"/>
           </a:p>
         </p:txBody>
@@ -8512,7 +8385,6 @@
           <a:bodyPr/>
           <a:lstStyle/>
           <a:p>
-            <a:pPr/>
             <a:r>
               <a:rPr lang="zh-CN" sz="1000" dirty="0">
                 <a:solidFill>
@@ -8586,7 +8458,6 @@
           <a:bodyPr/>
           <a:lstStyle/>
           <a:p>
-            <a:pPr/>
             <a:r>
               <a:rPr lang="zh-CN" sz="900" b="1" dirty="0" smtClean="0">
                 <a:solidFill>
@@ -8661,7 +8532,6 @@
           <a:bodyPr/>
           <a:lstStyle/>
           <a:p>
-            <a:pPr/>
             <a:r>
               <a:rPr lang="zh-CN" sz="900" dirty="0" smtClean="0">
                 <a:latin typeface="Microsoft YaHei"/>
@@ -8822,7 +8692,6 @@
           <a:bodyPr/>
           <a:lstStyle/>
           <a:p>
-            <a:pPr/>
             <a:r>
               <a:rPr lang="zh-CN" sz="1400" b="1" dirty="0" smtClean="0">
                 <a:solidFill>
@@ -8892,11 +8761,11 @@
 </file>
 
 <file path=ppt/slides/slide5.xml><?xml version="1.0" encoding="utf-8"?>
-<p:sld xmlns:a16="http://schemas.microsoft.com/office/drawing/2014/main" xmlns:r="http://schemas.openxmlformats.org/officeDocument/2006/relationships" xmlns:p="http://schemas.openxmlformats.org/presentationml/2006/main" xmlns:a="http://schemas.openxmlformats.org/drawingml/2006/main" xmlns:mc="http://schemas.openxmlformats.org/markup-compatibility/2006" mc:Ignorable="a16">
+<p:sld xmlns:a="http://schemas.openxmlformats.org/drawingml/2006/main" xmlns:r="http://schemas.openxmlformats.org/officeDocument/2006/relationships" xmlns:p="http://schemas.openxmlformats.org/presentationml/2006/main">
   <p:cSld>
     <p:spTree>
       <p:nvGrpSpPr>
-        <p:cNvPr id="137" name=""/>
+        <p:cNvPr id="1" name=""/>
         <p:cNvGrpSpPr/>
         <p:nvPr/>
       </p:nvGrpSpPr>
@@ -8931,7 +8800,6 @@
           <a:bodyPr/>
           <a:lstStyle/>
           <a:p>
-            <a:pPr/>
             <a:r>
               <a:rPr lang="zh-CN" altLang="en-US" sz="2100" b="1" dirty="0" smtClean="0">
                 <a:solidFill>
@@ -8977,7 +8845,6 @@
           <a:bodyPr/>
           <a:lstStyle/>
           <a:p>
-            <a:pPr/>
             <a:endParaRPr/>
           </a:p>
         </p:txBody>
@@ -9001,30 +8868,22 @@
               <a:tblGrid>
                 <a:gridCol w="698500">
                   <a:extLst>
-                    <a:ext uri="{9D8B030D-6E8A-4147-A177-3AD203B41FA5}">
-                      <a16:colId val="1"/>
-                    </a:ext>
+                    <a:ext uri="{9D8B030D-6E8A-4147-A177-3AD203B41FA5}"/>
                   </a:extLst>
                 </a:gridCol>
                 <a:gridCol w="1117600">
                   <a:extLst>
-                    <a:ext uri="{9D8B030D-6E8A-4147-A177-3AD203B41FA5}">
-                      <a16:colId val="2"/>
-                    </a:ext>
+                    <a:ext uri="{9D8B030D-6E8A-4147-A177-3AD203B41FA5}"/>
                   </a:extLst>
                 </a:gridCol>
                 <a:gridCol w="1117600">
                   <a:extLst>
-                    <a:ext uri="{9D8B030D-6E8A-4147-A177-3AD203B41FA5}">
-                      <a16:colId val="3"/>
-                    </a:ext>
+                    <a:ext uri="{9D8B030D-6E8A-4147-A177-3AD203B41FA5}"/>
                   </a:extLst>
                 </a:gridCol>
                 <a:gridCol w="1117600">
                   <a:extLst>
-                    <a:ext uri="{9D8B030D-6E8A-4147-A177-3AD203B41FA5}">
-                      <a16:colId val="4"/>
-                    </a:ext>
+                    <a:ext uri="{9D8B030D-6E8A-4147-A177-3AD203B41FA5}"/>
                   </a:extLst>
                 </a:gridCol>
               </a:tblGrid>
@@ -9285,9 +9144,7 @@
                   </a:tcPr>
                 </a:tc>
                 <a:extLst>
-                  <a:ext uri="{0D108BD9-81ED-4DB2-BD59-A6C34878D82A}">
-                    <a16:rowId val="1"/>
-                  </a:ext>
+                  <a:ext uri="{0D108BD9-81ED-4DB2-BD59-A6C34878D82A}"/>
                 </a:extLst>
               </a:tr>
               <a:tr h="196850">
@@ -9456,9 +9313,7 @@
                   </a:tcPr>
                 </a:tc>
                 <a:extLst>
-                  <a:ext uri="{0D108BD9-81ED-4DB2-BD59-A6C34878D82A}">
-                    <a16:rowId val="2"/>
-                  </a:ext>
+                  <a:ext uri="{0D108BD9-81ED-4DB2-BD59-A6C34878D82A}"/>
                 </a:extLst>
               </a:tr>
               <a:tr h="196850">
@@ -9614,9 +9469,7 @@
                   </a:tcPr>
                 </a:tc>
                 <a:extLst>
-                  <a:ext uri="{0D108BD9-81ED-4DB2-BD59-A6C34878D82A}">
-                    <a16:rowId val="3"/>
-                  </a:ext>
+                  <a:ext uri="{0D108BD9-81ED-4DB2-BD59-A6C34878D82A}"/>
                 </a:extLst>
               </a:tr>
               <a:tr h="196850">
@@ -9762,9 +9615,7 @@
                   </a:tcPr>
                 </a:tc>
                 <a:extLst>
-                  <a:ext uri="{0D108BD9-81ED-4DB2-BD59-A6C34878D82A}">
-                    <a16:rowId val="4"/>
-                  </a:ext>
+                  <a:ext uri="{0D108BD9-81ED-4DB2-BD59-A6C34878D82A}"/>
                 </a:extLst>
               </a:tr>
               <a:tr h="196850">
@@ -9909,9 +9760,7 @@
                   </a:tcPr>
                 </a:tc>
                 <a:extLst>
-                  <a:ext uri="{0D108BD9-81ED-4DB2-BD59-A6C34878D82A}">
-                    <a16:rowId val="5"/>
-                  </a:ext>
+                  <a:ext uri="{0D108BD9-81ED-4DB2-BD59-A6C34878D82A}"/>
                 </a:extLst>
               </a:tr>
               <a:tr h="196850">
@@ -10056,9 +9905,7 @@
                   </a:tcPr>
                 </a:tc>
                 <a:extLst>
-                  <a:ext uri="{0D108BD9-81ED-4DB2-BD59-A6C34878D82A}">
-                    <a16:rowId val="6"/>
-                  </a:ext>
+                  <a:ext uri="{0D108BD9-81ED-4DB2-BD59-A6C34878D82A}"/>
                 </a:extLst>
               </a:tr>
               <a:tr h="196850">
@@ -10203,9 +10050,7 @@
                   </a:tcPr>
                 </a:tc>
                 <a:extLst>
-                  <a:ext uri="{0D108BD9-81ED-4DB2-BD59-A6C34878D82A}">
-                    <a16:rowId val="7"/>
-                  </a:ext>
+                  <a:ext uri="{0D108BD9-81ED-4DB2-BD59-A6C34878D82A}"/>
                 </a:extLst>
               </a:tr>
               <a:tr h="196850">
@@ -10357,9 +10202,7 @@
                   </a:tcPr>
                 </a:tc>
                 <a:extLst>
-                  <a:ext uri="{0D108BD9-81ED-4DB2-BD59-A6C34878D82A}">
-                    <a16:rowId val="8"/>
-                  </a:ext>
+                  <a:ext uri="{0D108BD9-81ED-4DB2-BD59-A6C34878D82A}"/>
                 </a:extLst>
               </a:tr>
             </a:tbl>
@@ -10385,23 +10228,17 @@
               <a:tblGrid>
                 <a:gridCol w="1429871">
                   <a:extLst>
-                    <a:ext uri="{9D8B030D-6E8A-4147-A177-3AD203B41FA5}">
-                      <a16:colId val="1"/>
-                    </a:ext>
+                    <a:ext uri="{9D8B030D-6E8A-4147-A177-3AD203B41FA5}"/>
                   </a:extLst>
                 </a:gridCol>
                 <a:gridCol w="1072403">
                   <a:extLst>
-                    <a:ext uri="{9D8B030D-6E8A-4147-A177-3AD203B41FA5}">
-                      <a16:colId val="2"/>
-                    </a:ext>
+                    <a:ext uri="{9D8B030D-6E8A-4147-A177-3AD203B41FA5}"/>
                   </a:extLst>
                 </a:gridCol>
                 <a:gridCol w="1549026">
                   <a:extLst>
-                    <a:ext uri="{9D8B030D-6E8A-4147-A177-3AD203B41FA5}">
-                      <a16:colId val="3"/>
-                    </a:ext>
+                    <a:ext uri="{9D8B030D-6E8A-4147-A177-3AD203B41FA5}"/>
                   </a:extLst>
                 </a:gridCol>
               </a:tblGrid>
@@ -10600,9 +10437,7 @@
                   </a:tcPr>
                 </a:tc>
                 <a:extLst>
-                  <a:ext uri="{0D108BD9-81ED-4DB2-BD59-A6C34878D82A}">
-                    <a16:rowId val="1"/>
-                  </a:ext>
+                  <a:ext uri="{0D108BD9-81ED-4DB2-BD59-A6C34878D82A}"/>
                 </a:extLst>
               </a:tr>
               <a:tr h="279642">
@@ -10693,16 +10528,13 @@
                     <a:bodyPr/>
                     <a:lstStyle/>
                     <a:p>
-                      <a:pPr/>
                       <a:endParaRPr lang="zh-CN" altLang="en-US"/>
                     </a:p>
                   </a:txBody>
                   <a:tcPr/>
                 </a:tc>
                 <a:extLst>
-                  <a:ext uri="{0D108BD9-81ED-4DB2-BD59-A6C34878D82A}">
-                    <a16:rowId val="2"/>
-                  </a:ext>
+                  <a:ext uri="{0D108BD9-81ED-4DB2-BD59-A6C34878D82A}"/>
                 </a:extLst>
               </a:tr>
               <a:tr h="279642">
@@ -10812,9 +10644,7 @@
                   </a:tcPr>
                 </a:tc>
                 <a:extLst>
-                  <a:ext uri="{0D108BD9-81ED-4DB2-BD59-A6C34878D82A}">
-                    <a16:rowId val="3"/>
-                  </a:ext>
+                  <a:ext uri="{0D108BD9-81ED-4DB2-BD59-A6C34878D82A}"/>
                 </a:extLst>
               </a:tr>
               <a:tr h="279642">
@@ -10924,9 +10754,7 @@
                   </a:tcPr>
                 </a:tc>
                 <a:extLst>
-                  <a:ext uri="{0D108BD9-81ED-4DB2-BD59-A6C34878D82A}">
-                    <a16:rowId val="4"/>
-                  </a:ext>
+                  <a:ext uri="{0D108BD9-81ED-4DB2-BD59-A6C34878D82A}"/>
                 </a:extLst>
               </a:tr>
               <a:tr h="279642">
@@ -11036,9 +10864,7 @@
                   </a:tcPr>
                 </a:tc>
                 <a:extLst>
-                  <a:ext uri="{0D108BD9-81ED-4DB2-BD59-A6C34878D82A}">
-                    <a16:rowId val="5"/>
-                  </a:ext>
+                  <a:ext uri="{0D108BD9-81ED-4DB2-BD59-A6C34878D82A}"/>
                 </a:extLst>
               </a:tr>
               <a:tr h="279642">
@@ -11148,9 +10974,7 @@
                   </a:tcPr>
                 </a:tc>
                 <a:extLst>
-                  <a:ext uri="{0D108BD9-81ED-4DB2-BD59-A6C34878D82A}">
-                    <a16:rowId val="6"/>
-                  </a:ext>
+                  <a:ext uri="{0D108BD9-81ED-4DB2-BD59-A6C34878D82A}"/>
                 </a:extLst>
               </a:tr>
               <a:tr h="328870">
@@ -11263,9 +11087,7 @@
                   </a:tcPr>
                 </a:tc>
                 <a:extLst>
-                  <a:ext uri="{0D108BD9-81ED-4DB2-BD59-A6C34878D82A}">
-                    <a16:rowId val="7"/>
-                  </a:ext>
+                  <a:ext uri="{0D108BD9-81ED-4DB2-BD59-A6C34878D82A}"/>
                 </a:extLst>
               </a:tr>
               <a:tr h="279642">
@@ -11371,9 +11193,7 @@
                   </a:tcPr>
                 </a:tc>
                 <a:extLst>
-                  <a:ext uri="{0D108BD9-81ED-4DB2-BD59-A6C34878D82A}">
-                    <a16:rowId val="8"/>
-                  </a:ext>
+                  <a:ext uri="{0D108BD9-81ED-4DB2-BD59-A6C34878D82A}"/>
                 </a:extLst>
               </a:tr>
             </a:tbl>
@@ -11402,7 +11222,6 @@
           </a:bodyPr>
           <a:lstStyle/>
           <a:p>
-            <a:pPr/>
             <a:r>
               <a:rPr sz="1050" dirty="0"/>
               <a:t>注：统计区间为2020年1月2日-2026年9月30日（日频）。计算夏普比例时，无风险收益按0%计。组合收益按年化1%费率逐日计提扣除。基金成立前用跟踪指数（价格指数）涨跌代替，成立后接续基金净值。季度末再平衡，未计交易费用。基准为中证全指全收益指数。</a:t>
@@ -11420,7 +11239,7 @@
           <p:nvPr/>
         </p:nvPicPr>
         <p:blipFill>
-          <a:blip r:embed="rId1"/>
+          <a:blip r:embed="rId2"/>
           <a:stretch>
             <a:fillRect/>
           </a:stretch>
@@ -11444,11 +11263,11 @@
 </file>
 
 <file path=ppt/slides/slide6.xml><?xml version="1.0" encoding="utf-8"?>
-<p:sld xmlns:a16="http://schemas.microsoft.com/office/drawing/2014/main" xmlns:p="http://schemas.openxmlformats.org/presentationml/2006/main" xmlns:a="http://schemas.openxmlformats.org/drawingml/2006/main" xmlns:mc="http://schemas.openxmlformats.org/markup-compatibility/2006" mc:Ignorable="a16">
+<p:sld xmlns:a="http://schemas.openxmlformats.org/drawingml/2006/main" xmlns:r="http://schemas.openxmlformats.org/officeDocument/2006/relationships" xmlns:p="http://schemas.openxmlformats.org/presentationml/2006/main">
   <p:cSld>
     <p:spTree>
       <p:nvGrpSpPr>
-        <p:cNvPr id="144" name=""/>
+        <p:cNvPr id="1" name=""/>
         <p:cNvGrpSpPr/>
         <p:nvPr/>
       </p:nvGrpSpPr>
@@ -11555,114 +11374,82 @@
               <a:tblGrid>
                 <a:gridCol w="822960">
                   <a:extLst>
-                    <a:ext uri="{9D8B030D-6E8A-4147-A177-3AD203B41FA5}">
-                      <a16:colId val="1"/>
-                    </a:ext>
+                    <a:ext uri="{9D8B030D-6E8A-4147-A177-3AD203B41FA5}"/>
                   </a:extLst>
                 </a:gridCol>
                 <a:gridCol w="713232">
                   <a:extLst>
-                    <a:ext uri="{9D8B030D-6E8A-4147-A177-3AD203B41FA5}">
-                      <a16:colId val="2"/>
-                    </a:ext>
+                    <a:ext uri="{9D8B030D-6E8A-4147-A177-3AD203B41FA5}"/>
                   </a:extLst>
                 </a:gridCol>
                 <a:gridCol w="713232">
                   <a:extLst>
-                    <a:ext uri="{9D8B030D-6E8A-4147-A177-3AD203B41FA5}">
-                      <a16:colId val="3"/>
-                    </a:ext>
+                    <a:ext uri="{9D8B030D-6E8A-4147-A177-3AD203B41FA5}"/>
                   </a:extLst>
                 </a:gridCol>
                 <a:gridCol w="713232">
                   <a:extLst>
-                    <a:ext uri="{9D8B030D-6E8A-4147-A177-3AD203B41FA5}">
-                      <a16:colId val="4"/>
-                    </a:ext>
+                    <a:ext uri="{9D8B030D-6E8A-4147-A177-3AD203B41FA5}"/>
                   </a:extLst>
                 </a:gridCol>
                 <a:gridCol w="713232">
                   <a:extLst>
-                    <a:ext uri="{9D8B030D-6E8A-4147-A177-3AD203B41FA5}">
-                      <a16:colId val="5"/>
-                    </a:ext>
+                    <a:ext uri="{9D8B030D-6E8A-4147-A177-3AD203B41FA5}"/>
                   </a:extLst>
                 </a:gridCol>
                 <a:gridCol w="713232">
                   <a:extLst>
-                    <a:ext uri="{9D8B030D-6E8A-4147-A177-3AD203B41FA5}">
-                      <a16:colId val="6"/>
-                    </a:ext>
+                    <a:ext uri="{9D8B030D-6E8A-4147-A177-3AD203B41FA5}"/>
                   </a:extLst>
                 </a:gridCol>
                 <a:gridCol w="713232">
                   <a:extLst>
-                    <a:ext uri="{9D8B030D-6E8A-4147-A177-3AD203B41FA5}">
-                      <a16:colId val="7"/>
-                    </a:ext>
+                    <a:ext uri="{9D8B030D-6E8A-4147-A177-3AD203B41FA5}"/>
                   </a:extLst>
                 </a:gridCol>
                 <a:gridCol w="713232">
                   <a:extLst>
-                    <a:ext uri="{9D8B030D-6E8A-4147-A177-3AD203B41FA5}">
-                      <a16:colId val="8"/>
-                    </a:ext>
+                    <a:ext uri="{9D8B030D-6E8A-4147-A177-3AD203B41FA5}"/>
                   </a:extLst>
                 </a:gridCol>
                 <a:gridCol w="713232">
                   <a:extLst>
-                    <a:ext uri="{9D8B030D-6E8A-4147-A177-3AD203B41FA5}">
-                      <a16:colId val="9"/>
-                    </a:ext>
+                    <a:ext uri="{9D8B030D-6E8A-4147-A177-3AD203B41FA5}"/>
                   </a:extLst>
                 </a:gridCol>
                 <a:gridCol w="713232">
                   <a:extLst>
-                    <a:ext uri="{9D8B030D-6E8A-4147-A177-3AD203B41FA5}">
-                      <a16:colId val="10"/>
-                    </a:ext>
+                    <a:ext uri="{9D8B030D-6E8A-4147-A177-3AD203B41FA5}"/>
                   </a:extLst>
                 </a:gridCol>
                 <a:gridCol w="713232">
                   <a:extLst>
-                    <a:ext uri="{9D8B030D-6E8A-4147-A177-3AD203B41FA5}">
-                      <a16:colId val="11"/>
-                    </a:ext>
+                    <a:ext uri="{9D8B030D-6E8A-4147-A177-3AD203B41FA5}"/>
                   </a:extLst>
                 </a:gridCol>
                 <a:gridCol w="713232">
                   <a:extLst>
-                    <a:ext uri="{9D8B030D-6E8A-4147-A177-3AD203B41FA5}">
-                      <a16:colId val="12"/>
-                    </a:ext>
+                    <a:ext uri="{9D8B030D-6E8A-4147-A177-3AD203B41FA5}"/>
                   </a:extLst>
                 </a:gridCol>
                 <a:gridCol w="713232">
                   <a:extLst>
-                    <a:ext uri="{9D8B030D-6E8A-4147-A177-3AD203B41FA5}">
-                      <a16:colId val="13"/>
-                    </a:ext>
+                    <a:ext uri="{9D8B030D-6E8A-4147-A177-3AD203B41FA5}"/>
                   </a:extLst>
                 </a:gridCol>
                 <a:gridCol w="822960">
                   <a:extLst>
-                    <a:ext uri="{9D8B030D-6E8A-4147-A177-3AD203B41FA5}">
-                      <a16:colId val="14"/>
-                    </a:ext>
+                    <a:ext uri="{9D8B030D-6E8A-4147-A177-3AD203B41FA5}"/>
                   </a:extLst>
                 </a:gridCol>
                 <a:gridCol w="713232">
                   <a:extLst>
-                    <a:ext uri="{9D8B030D-6E8A-4147-A177-3AD203B41FA5}">
-                      <a16:colId val="15"/>
-                    </a:ext>
+                    <a:ext uri="{9D8B030D-6E8A-4147-A177-3AD203B41FA5}"/>
                   </a:extLst>
                 </a:gridCol>
                 <a:gridCol w="822960">
                   <a:extLst>
-                    <a:ext uri="{9D8B030D-6E8A-4147-A177-3AD203B41FA5}">
-                      <a16:colId val="16"/>
-                    </a:ext>
+                    <a:ext uri="{9D8B030D-6E8A-4147-A177-3AD203B41FA5}"/>
                   </a:extLst>
                 </a:gridCol>
               </a:tblGrid>
@@ -12057,9 +11844,7 @@
                   </a:tcPr>
                 </a:tc>
                 <a:extLst>
-                  <a:ext uri="{0D108BD9-81ED-4DB2-BD59-A6C34878D82A}">
-                    <a16:rowId val="1"/>
-                  </a:ext>
+                  <a:ext uri="{0D108BD9-81ED-4DB2-BD59-A6C34878D82A}"/>
                 </a:extLst>
               </a:tr>
               <a:tr h="384048">
@@ -12448,9 +12233,7 @@
                   </a:tcPr>
                 </a:tc>
                 <a:extLst>
-                  <a:ext uri="{0D108BD9-81ED-4DB2-BD59-A6C34878D82A}">
-                    <a16:rowId val="2"/>
-                  </a:ext>
+                  <a:ext uri="{0D108BD9-81ED-4DB2-BD59-A6C34878D82A}"/>
                 </a:extLst>
               </a:tr>
               <a:tr h="384048">
@@ -12839,9 +12622,7 @@
                   </a:tcPr>
                 </a:tc>
                 <a:extLst>
-                  <a:ext uri="{0D108BD9-81ED-4DB2-BD59-A6C34878D82A}">
-                    <a16:rowId val="3"/>
-                  </a:ext>
+                  <a:ext uri="{0D108BD9-81ED-4DB2-BD59-A6C34878D82A}"/>
                 </a:extLst>
               </a:tr>
               <a:tr h="384048">
@@ -13230,9 +13011,7 @@
                   </a:tcPr>
                 </a:tc>
                 <a:extLst>
-                  <a:ext uri="{0D108BD9-81ED-4DB2-BD59-A6C34878D82A}">
-                    <a16:rowId val="4"/>
-                  </a:ext>
+                  <a:ext uri="{0D108BD9-81ED-4DB2-BD59-A6C34878D82A}"/>
                 </a:extLst>
               </a:tr>
               <a:tr h="384048">
@@ -13621,9 +13400,7 @@
                   </a:tcPr>
                 </a:tc>
                 <a:extLst>
-                  <a:ext uri="{0D108BD9-81ED-4DB2-BD59-A6C34878D82A}">
-                    <a16:rowId val="5"/>
-                  </a:ext>
+                  <a:ext uri="{0D108BD9-81ED-4DB2-BD59-A6C34878D82A}"/>
                 </a:extLst>
               </a:tr>
               <a:tr h="384048">
@@ -14012,9 +13789,7 @@
                   </a:tcPr>
                 </a:tc>
                 <a:extLst>
-                  <a:ext uri="{0D108BD9-81ED-4DB2-BD59-A6C34878D82A}">
-                    <a16:rowId val="6"/>
-                  </a:ext>
+                  <a:ext uri="{0D108BD9-81ED-4DB2-BD59-A6C34878D82A}"/>
                 </a:extLst>
               </a:tr>
               <a:tr h="384048">
@@ -14403,9 +14178,7 @@
                   </a:tcPr>
                 </a:tc>
                 <a:extLst>
-                  <a:ext uri="{0D108BD9-81ED-4DB2-BD59-A6C34878D82A}">
-                    <a16:rowId val="7"/>
-                  </a:ext>
+                  <a:ext uri="{0D108BD9-81ED-4DB2-BD59-A6C34878D82A}"/>
                 </a:extLst>
               </a:tr>
               <a:tr h="384048">
@@ -14767,9 +14540,7 @@
                   </a:tcPr>
                 </a:tc>
                 <a:extLst>
-                  <a:ext uri="{0D108BD9-81ED-4DB2-BD59-A6C34878D82A}">
-                    <a16:rowId val="8"/>
-                  </a:ext>
+                  <a:ext uri="{0D108BD9-81ED-4DB2-BD59-A6C34878D82A}"/>
                 </a:extLst>
               </a:tr>
               <a:tr h="384048">
@@ -15055,9 +14826,7 @@
                   </a:tcPr>
                 </a:tc>
                 <a:extLst>
-                  <a:ext uri="{0D108BD9-81ED-4DB2-BD59-A6C34878D82A}">
-                    <a16:rowId val="9"/>
-                  </a:ext>
+                  <a:ext uri="{0D108BD9-81ED-4DB2-BD59-A6C34878D82A}"/>
                 </a:extLst>
               </a:tr>
             </a:tbl>
@@ -15086,7 +14855,6 @@
           </a:bodyPr>
           <a:lstStyle/>
           <a:p>
-            <a:pPr/>
             <a:r>
               <a:rPr sz="1200" dirty="0"/>
               <a:t>注：统计区间为2020年1月2日-2026年9月30日（日频）。计算夏普比例时，无风险收益按0%计。组合收益按年化1%费率逐日计提扣除。基金成立前用跟踪指数（价格指数）涨跌代替，成立后接续基金净值。季度末再平衡</a:t>
@@ -15126,7 +14894,6 @@
           <a:bodyPr/>
           <a:lstStyle/>
           <a:p>
-            <a:pPr/>
             <a:r>
               <a:rPr lang="zh-CN" altLang="en-US" sz="2100" b="1" dirty="0" smtClean="0">
                 <a:solidFill>
@@ -15172,7 +14939,6 @@
           <a:bodyPr/>
           <a:lstStyle/>
           <a:p>
-            <a:pPr/>
             <a:endParaRPr/>
           </a:p>
         </p:txBody>
@@ -15186,11 +14952,11 @@
 </file>
 
 <file path=ppt/slides/slide7.xml><?xml version="1.0" encoding="utf-8"?>
-<p:sld xmlns:a16="http://schemas.microsoft.com/office/drawing/2014/main" xmlns:p="http://schemas.openxmlformats.org/presentationml/2006/main" xmlns:a="http://schemas.openxmlformats.org/drawingml/2006/main" xmlns:mc="http://schemas.openxmlformats.org/markup-compatibility/2006" mc:Ignorable="a16">
+<p:sld xmlns:a="http://schemas.openxmlformats.org/drawingml/2006/main" xmlns:r="http://schemas.openxmlformats.org/officeDocument/2006/relationships" xmlns:p="http://schemas.openxmlformats.org/presentationml/2006/main">
   <p:cSld>
     <p:spTree>
       <p:nvGrpSpPr>
-        <p:cNvPr id="150" name=""/>
+        <p:cNvPr id="1" name=""/>
         <p:cNvGrpSpPr/>
         <p:nvPr/>
       </p:nvGrpSpPr>
@@ -15273,7 +15039,7 @@
                 <a:latin typeface="微软雅黑" panose="020B0503020204020204" pitchFamily="34" charset="-122"/>
                 <a:ea typeface="微软雅黑" panose="020B0503020204020204" pitchFamily="34" charset="-122"/>
               </a:rPr>
-              <a:t xml:space="preserve"> </a:t>
+              <a:t> </a:t>
             </a:r>
             <a:r>
               <a:rPr sz="1400" dirty="0" err="1">
@@ -15337,114 +15103,82 @@
               <a:tblGrid>
                 <a:gridCol w="822960">
                   <a:extLst>
-                    <a:ext uri="{9D8B030D-6E8A-4147-A177-3AD203B41FA5}">
-                      <a16:colId val="1"/>
-                    </a:ext>
+                    <a:ext uri="{9D8B030D-6E8A-4147-A177-3AD203B41FA5}"/>
                   </a:extLst>
                 </a:gridCol>
                 <a:gridCol w="713232">
                   <a:extLst>
-                    <a:ext uri="{9D8B030D-6E8A-4147-A177-3AD203B41FA5}">
-                      <a16:colId val="2"/>
-                    </a:ext>
+                    <a:ext uri="{9D8B030D-6E8A-4147-A177-3AD203B41FA5}"/>
                   </a:extLst>
                 </a:gridCol>
                 <a:gridCol w="713232">
                   <a:extLst>
-                    <a:ext uri="{9D8B030D-6E8A-4147-A177-3AD203B41FA5}">
-                      <a16:colId val="3"/>
-                    </a:ext>
+                    <a:ext uri="{9D8B030D-6E8A-4147-A177-3AD203B41FA5}"/>
                   </a:extLst>
                 </a:gridCol>
                 <a:gridCol w="713232">
                   <a:extLst>
-                    <a:ext uri="{9D8B030D-6E8A-4147-A177-3AD203B41FA5}">
-                      <a16:colId val="4"/>
-                    </a:ext>
+                    <a:ext uri="{9D8B030D-6E8A-4147-A177-3AD203B41FA5}"/>
                   </a:extLst>
                 </a:gridCol>
                 <a:gridCol w="713232">
                   <a:extLst>
-                    <a:ext uri="{9D8B030D-6E8A-4147-A177-3AD203B41FA5}">
-                      <a16:colId val="5"/>
-                    </a:ext>
+                    <a:ext uri="{9D8B030D-6E8A-4147-A177-3AD203B41FA5}"/>
                   </a:extLst>
                 </a:gridCol>
                 <a:gridCol w="713232">
                   <a:extLst>
-                    <a:ext uri="{9D8B030D-6E8A-4147-A177-3AD203B41FA5}">
-                      <a16:colId val="6"/>
-                    </a:ext>
+                    <a:ext uri="{9D8B030D-6E8A-4147-A177-3AD203B41FA5}"/>
                   </a:extLst>
                 </a:gridCol>
                 <a:gridCol w="713232">
                   <a:extLst>
-                    <a:ext uri="{9D8B030D-6E8A-4147-A177-3AD203B41FA5}">
-                      <a16:colId val="7"/>
-                    </a:ext>
+                    <a:ext uri="{9D8B030D-6E8A-4147-A177-3AD203B41FA5}"/>
                   </a:extLst>
                 </a:gridCol>
                 <a:gridCol w="713232">
                   <a:extLst>
-                    <a:ext uri="{9D8B030D-6E8A-4147-A177-3AD203B41FA5}">
-                      <a16:colId val="8"/>
-                    </a:ext>
+                    <a:ext uri="{9D8B030D-6E8A-4147-A177-3AD203B41FA5}"/>
                   </a:extLst>
                 </a:gridCol>
                 <a:gridCol w="713232">
                   <a:extLst>
-                    <a:ext uri="{9D8B030D-6E8A-4147-A177-3AD203B41FA5}">
-                      <a16:colId val="9"/>
-                    </a:ext>
+                    <a:ext uri="{9D8B030D-6E8A-4147-A177-3AD203B41FA5}"/>
                   </a:extLst>
                 </a:gridCol>
                 <a:gridCol w="713232">
                   <a:extLst>
-                    <a:ext uri="{9D8B030D-6E8A-4147-A177-3AD203B41FA5}">
-                      <a16:colId val="10"/>
-                    </a:ext>
+                    <a:ext uri="{9D8B030D-6E8A-4147-A177-3AD203B41FA5}"/>
                   </a:extLst>
                 </a:gridCol>
                 <a:gridCol w="713232">
                   <a:extLst>
-                    <a:ext uri="{9D8B030D-6E8A-4147-A177-3AD203B41FA5}">
-                      <a16:colId val="11"/>
-                    </a:ext>
+                    <a:ext uri="{9D8B030D-6E8A-4147-A177-3AD203B41FA5}"/>
                   </a:extLst>
                 </a:gridCol>
                 <a:gridCol w="713232">
                   <a:extLst>
-                    <a:ext uri="{9D8B030D-6E8A-4147-A177-3AD203B41FA5}">
-                      <a16:colId val="12"/>
-                    </a:ext>
+                    <a:ext uri="{9D8B030D-6E8A-4147-A177-3AD203B41FA5}"/>
                   </a:extLst>
                 </a:gridCol>
                 <a:gridCol w="713232">
                   <a:extLst>
-                    <a:ext uri="{9D8B030D-6E8A-4147-A177-3AD203B41FA5}">
-                      <a16:colId val="13"/>
-                    </a:ext>
+                    <a:ext uri="{9D8B030D-6E8A-4147-A177-3AD203B41FA5}"/>
                   </a:extLst>
                 </a:gridCol>
                 <a:gridCol w="822960">
                   <a:extLst>
-                    <a:ext uri="{9D8B030D-6E8A-4147-A177-3AD203B41FA5}">
-                      <a16:colId val="14"/>
-                    </a:ext>
+                    <a:ext uri="{9D8B030D-6E8A-4147-A177-3AD203B41FA5}"/>
                   </a:extLst>
                 </a:gridCol>
                 <a:gridCol w="713232">
                   <a:extLst>
-                    <a:ext uri="{9D8B030D-6E8A-4147-A177-3AD203B41FA5}">
-                      <a16:colId val="15"/>
-                    </a:ext>
+                    <a:ext uri="{9D8B030D-6E8A-4147-A177-3AD203B41FA5}"/>
                   </a:extLst>
                 </a:gridCol>
                 <a:gridCol w="822960">
                   <a:extLst>
-                    <a:ext uri="{9D8B030D-6E8A-4147-A177-3AD203B41FA5}">
-                      <a16:colId val="16"/>
-                    </a:ext>
+                    <a:ext uri="{9D8B030D-6E8A-4147-A177-3AD203B41FA5}"/>
                   </a:extLst>
                 </a:gridCol>
               </a:tblGrid>
@@ -15839,9 +15573,7 @@
                   </a:tcPr>
                 </a:tc>
                 <a:extLst>
-                  <a:ext uri="{0D108BD9-81ED-4DB2-BD59-A6C34878D82A}">
-                    <a16:rowId val="1"/>
-                  </a:ext>
+                  <a:ext uri="{0D108BD9-81ED-4DB2-BD59-A6C34878D82A}"/>
                 </a:extLst>
               </a:tr>
               <a:tr h="384048">
@@ -16230,9 +15962,7 @@
                   </a:tcPr>
                 </a:tc>
                 <a:extLst>
-                  <a:ext uri="{0D108BD9-81ED-4DB2-BD59-A6C34878D82A}">
-                    <a16:rowId val="2"/>
-                  </a:ext>
+                  <a:ext uri="{0D108BD9-81ED-4DB2-BD59-A6C34878D82A}"/>
                 </a:extLst>
               </a:tr>
               <a:tr h="384048">
@@ -16621,9 +16351,7 @@
                   </a:tcPr>
                 </a:tc>
                 <a:extLst>
-                  <a:ext uri="{0D108BD9-81ED-4DB2-BD59-A6C34878D82A}">
-                    <a16:rowId val="3"/>
-                  </a:ext>
+                  <a:ext uri="{0D108BD9-81ED-4DB2-BD59-A6C34878D82A}"/>
                 </a:extLst>
               </a:tr>
               <a:tr h="384048">
@@ -17012,9 +16740,7 @@
                   </a:tcPr>
                 </a:tc>
                 <a:extLst>
-                  <a:ext uri="{0D108BD9-81ED-4DB2-BD59-A6C34878D82A}">
-                    <a16:rowId val="4"/>
-                  </a:ext>
+                  <a:ext uri="{0D108BD9-81ED-4DB2-BD59-A6C34878D82A}"/>
                 </a:extLst>
               </a:tr>
               <a:tr h="384048">
@@ -17403,9 +17129,7 @@
                   </a:tcPr>
                 </a:tc>
                 <a:extLst>
-                  <a:ext uri="{0D108BD9-81ED-4DB2-BD59-A6C34878D82A}">
-                    <a16:rowId val="5"/>
-                  </a:ext>
+                  <a:ext uri="{0D108BD9-81ED-4DB2-BD59-A6C34878D82A}"/>
                 </a:extLst>
               </a:tr>
               <a:tr h="384048">
@@ -17794,9 +17518,7 @@
                   </a:tcPr>
                 </a:tc>
                 <a:extLst>
-                  <a:ext uri="{0D108BD9-81ED-4DB2-BD59-A6C34878D82A}">
-                    <a16:rowId val="6"/>
-                  </a:ext>
+                  <a:ext uri="{0D108BD9-81ED-4DB2-BD59-A6C34878D82A}"/>
                 </a:extLst>
               </a:tr>
               <a:tr h="384048">
@@ -18185,9 +17907,7 @@
                   </a:tcPr>
                 </a:tc>
                 <a:extLst>
-                  <a:ext uri="{0D108BD9-81ED-4DB2-BD59-A6C34878D82A}">
-                    <a16:rowId val="7"/>
-                  </a:ext>
+                  <a:ext uri="{0D108BD9-81ED-4DB2-BD59-A6C34878D82A}"/>
                 </a:extLst>
               </a:tr>
               <a:tr h="384048">
@@ -18549,9 +18269,7 @@
                   </a:tcPr>
                 </a:tc>
                 <a:extLst>
-                  <a:ext uri="{0D108BD9-81ED-4DB2-BD59-A6C34878D82A}">
-                    <a16:rowId val="8"/>
-                  </a:ext>
+                  <a:ext uri="{0D108BD9-81ED-4DB2-BD59-A6C34878D82A}"/>
                 </a:extLst>
               </a:tr>
               <a:tr h="384048">
@@ -18832,9 +18550,7 @@
                   </a:tcPr>
                 </a:tc>
                 <a:extLst>
-                  <a:ext uri="{0D108BD9-81ED-4DB2-BD59-A6C34878D82A}">
-                    <a16:rowId val="9"/>
-                  </a:ext>
+                  <a:ext uri="{0D108BD9-81ED-4DB2-BD59-A6C34878D82A}"/>
                 </a:extLst>
               </a:tr>
             </a:tbl>
@@ -18863,7 +18579,6 @@
           </a:bodyPr>
           <a:lstStyle/>
           <a:p>
-            <a:pPr/>
             <a:r>
               <a:rPr sz="1200" dirty="0"/>
               <a:t>注：统计区间为2020年1月2日-2026年9月30日（日频）。计算夏普比例时，无风险收益按0%计。组合收益按年化1%费率逐日计提扣除。基金成立前用跟踪指数（价格指数）涨跌代替，成立后接续基金净值。</a:t>
@@ -18911,7 +18626,6 @@
           <a:bodyPr/>
           <a:lstStyle/>
           <a:p>
-            <a:pPr/>
             <a:r>
               <a:rPr lang="zh-CN" altLang="en-US" sz="2100" b="1" dirty="0" smtClean="0">
                 <a:solidFill>
@@ -18957,7 +18671,6 @@
           <a:bodyPr/>
           <a:lstStyle/>
           <a:p>
-            <a:pPr/>
             <a:endParaRPr/>
           </a:p>
         </p:txBody>
@@ -18971,11 +18684,11 @@
 </file>
 
 <file path=ppt/slides/slide8.xml><?xml version="1.0" encoding="utf-8"?>
-<p:sld xmlns:a16="http://schemas.microsoft.com/office/drawing/2014/main" xmlns:p="http://schemas.openxmlformats.org/presentationml/2006/main" xmlns:a="http://schemas.openxmlformats.org/drawingml/2006/main" xmlns:mc="http://schemas.openxmlformats.org/markup-compatibility/2006" mc:Ignorable="a16">
+<p:sld xmlns:a="http://schemas.openxmlformats.org/drawingml/2006/main" xmlns:r="http://schemas.openxmlformats.org/officeDocument/2006/relationships" xmlns:p="http://schemas.openxmlformats.org/presentationml/2006/main">
   <p:cSld>
     <p:spTree>
       <p:nvGrpSpPr>
-        <p:cNvPr id="156" name=""/>
+        <p:cNvPr id="1" name=""/>
         <p:cNvGrpSpPr/>
         <p:nvPr/>
       </p:nvGrpSpPr>
@@ -18989,36 +18702,7 @@
       </p:grpSpPr>
       <p:sp>
         <p:nvSpPr>
-          <p:cNvPr id="157" name=""/>
-          <p:cNvSpPr/>
-          <p:nvPr/>
-        </p:nvSpPr>
-        <p:spPr>
-          <a:xfrm>
-            <a:off x="0" y="0"/>
-            <a:ext cx="12192000" cy="6858000"/>
-          </a:xfrm>
-          <a:prstGeom prst="rect">
-            <a:avLst/>
-          </a:prstGeom>
-          <a:solidFill>
-            <a:srgbClr val="FFFFFF"/>
-          </a:solidFill>
-          <a:ln>
-            <a:noFill/>
-          </a:ln>
-        </p:spPr>
-        <p:txBody>
-          <a:bodyPr/>
-          <a:p>
-            <a:pPr/>
-            <a:endParaRPr/>
-          </a:p>
-        </p:txBody>
-      </p:sp>
-      <p:sp>
-        <p:nvSpPr>
-          <p:cNvPr id="158" name=""/>
+          <p:cNvPr id="158" name="矩形 157"/>
           <p:cNvSpPr/>
           <p:nvPr/>
         </p:nvSpPr>
@@ -19037,19 +18721,39 @@
         </p:spPr>
         <p:txBody>
           <a:bodyPr/>
+          <a:lstStyle/>
           <a:p>
-            <a:pPr/>
-            <a:r>
-              <a:rPr lang="zh-CN" sz="2100" b="1">
+            <a:r>
+              <a:rPr lang="zh-CN" sz="2100" b="1" dirty="0">
                 <a:solidFill>
                   <a:srgbClr val="061F32"/>
                 </a:solidFill>
                 <a:latin typeface="Microsoft YaHei"/>
                 <a:ea typeface="Microsoft YaHei"/>
               </a:rPr>
-              <a:t>守正组合压力测试：市场下跌时，组合跌得更少</a:t>
-            </a:r>
-            <a:endParaRPr lang="zh-CN" sz="2100" b="1">
+              <a:t>守正组合压力测试：市场下跌时，</a:t>
+            </a:r>
+            <a:r>
+              <a:rPr lang="zh-CN" sz="2100" b="1" dirty="0" smtClean="0">
+                <a:solidFill>
+                  <a:srgbClr val="061F32"/>
+                </a:solidFill>
+                <a:latin typeface="Microsoft YaHei"/>
+                <a:ea typeface="Microsoft YaHei"/>
+              </a:rPr>
+              <a:t>组合</a:t>
+            </a:r>
+            <a:r>
+              <a:rPr lang="zh-CN" altLang="en-US" sz="2100" b="1" dirty="0" smtClean="0">
+                <a:solidFill>
+                  <a:srgbClr val="061F32"/>
+                </a:solidFill>
+                <a:latin typeface="Microsoft YaHei"/>
+                <a:ea typeface="Microsoft YaHei"/>
+              </a:rPr>
+              <a:t>“守的住”</a:t>
+            </a:r>
+            <a:endParaRPr lang="zh-CN" sz="2100" b="1" dirty="0">
               <a:solidFill>
                 <a:srgbClr val="061F32"/>
               </a:solidFill>
@@ -19061,7 +18765,7 @@
       </p:sp>
       <p:sp>
         <p:nvSpPr>
-          <p:cNvPr id="159" name=""/>
+          <p:cNvPr id="159" name="矩形 158"/>
           <p:cNvSpPr/>
           <p:nvPr/>
         </p:nvSpPr>
@@ -19082,15 +18786,15 @@
         </p:spPr>
         <p:txBody>
           <a:bodyPr/>
+          <a:lstStyle/>
           <a:p>
-            <a:pPr/>
             <a:endParaRPr/>
           </a:p>
         </p:txBody>
       </p:sp>
       <p:sp>
         <p:nvSpPr>
-          <p:cNvPr id="160" name=""/>
+          <p:cNvPr id="160" name="矩形 159"/>
           <p:cNvSpPr/>
           <p:nvPr/>
         </p:nvSpPr>
@@ -19111,15 +18815,15 @@
         </p:spPr>
         <p:txBody>
           <a:bodyPr/>
+          <a:lstStyle/>
           <a:p>
-            <a:pPr/>
             <a:endParaRPr/>
           </a:p>
         </p:txBody>
       </p:sp>
       <p:sp>
         <p:nvSpPr>
-          <p:cNvPr id="161" name=""/>
+          <p:cNvPr id="161" name="矩形 160"/>
           <p:cNvSpPr/>
           <p:nvPr/>
         </p:nvSpPr>
@@ -19140,15 +18844,15 @@
         </p:spPr>
         <p:txBody>
           <a:bodyPr/>
+          <a:lstStyle/>
           <a:p>
-            <a:pPr/>
             <a:endParaRPr/>
           </a:p>
         </p:txBody>
       </p:sp>
       <p:sp>
         <p:nvSpPr>
-          <p:cNvPr id="162" name=""/>
+          <p:cNvPr id="162" name="矩形 161"/>
           <p:cNvSpPr/>
           <p:nvPr/>
         </p:nvSpPr>
@@ -19167,19 +18871,69 @@
         </p:spPr>
         <p:txBody>
           <a:bodyPr/>
+          <a:lstStyle/>
           <a:p>
-            <a:pPr/>
-            <a:r>
-              <a:rPr lang="zh-CN" sz="1200" b="1">
+            <a:r>
+              <a:rPr lang="zh-CN" altLang="en-US" sz="1200" b="1" dirty="0" smtClean="0">
                 <a:solidFill>
                   <a:srgbClr val="061F32"/>
                 </a:solidFill>
                 <a:latin typeface="Microsoft YaHei"/>
                 <a:ea typeface="Microsoft YaHei"/>
               </a:rPr>
-              <a:t>四次黑天鹅中，守正组合回撤均小于中证1000/中证2000/科创50，较同期最深的小盘/成长指数少跌 5~21 个百分点。</a:t>
-            </a:r>
-            <a:endParaRPr lang="zh-CN" sz="1200" b="1">
+              <a:t>近年</a:t>
+            </a:r>
+            <a:r>
+              <a:rPr lang="zh-CN" sz="1200" b="1" dirty="0" smtClean="0">
+                <a:solidFill>
+                  <a:srgbClr val="061F32"/>
+                </a:solidFill>
+                <a:latin typeface="Microsoft YaHei"/>
+                <a:ea typeface="Microsoft YaHei"/>
+              </a:rPr>
+              <a:t>四</a:t>
+            </a:r>
+            <a:r>
+              <a:rPr lang="zh-CN" sz="1200" b="1" dirty="0">
+                <a:solidFill>
+                  <a:srgbClr val="061F32"/>
+                </a:solidFill>
+                <a:latin typeface="Microsoft YaHei"/>
+                <a:ea typeface="Microsoft YaHei"/>
+              </a:rPr>
+              <a:t>次黑天鹅中，守正组合回</a:t>
+            </a:r>
+            <a:r>
+              <a:rPr lang="zh-CN" sz="1200" b="1" dirty="0" smtClean="0">
+                <a:solidFill>
+                  <a:srgbClr val="061F32"/>
+                </a:solidFill>
+                <a:latin typeface="Microsoft YaHei"/>
+                <a:ea typeface="Microsoft YaHei"/>
+              </a:rPr>
+              <a:t>撤</a:t>
+            </a:r>
+            <a:r>
+              <a:rPr lang="zh-CN" altLang="en-US" sz="1200" b="1" dirty="0">
+                <a:solidFill>
+                  <a:srgbClr val="061F32"/>
+                </a:solidFill>
+                <a:latin typeface="Microsoft YaHei"/>
+                <a:ea typeface="Microsoft YaHei"/>
+              </a:rPr>
+              <a:t>相较</a:t>
+            </a:r>
+            <a:r>
+              <a:rPr lang="zh-CN" altLang="en-US" sz="1200" b="1" dirty="0" smtClean="0">
+                <a:solidFill>
+                  <a:srgbClr val="061F32"/>
+                </a:solidFill>
+                <a:latin typeface="Microsoft YaHei"/>
+                <a:ea typeface="Microsoft YaHei"/>
+              </a:rPr>
+              <a:t>于宽基、成长、基金指数跌幅更小</a:t>
+            </a:r>
+            <a:endParaRPr lang="zh-CN" sz="1200" b="1" dirty="0">
               <a:solidFill>
                 <a:srgbClr val="061F32"/>
               </a:solidFill>
@@ -19191,93 +18945,13 @@
       </p:sp>
       <p:sp>
         <p:nvSpPr>
-          <p:cNvPr id="163" name=""/>
+          <p:cNvPr id="165" name="矩形 164"/>
           <p:cNvSpPr/>
           <p:nvPr/>
         </p:nvSpPr>
         <p:spPr>
           <a:xfrm>
-            <a:off x="10541000" y="1066800"/>
-            <a:ext cx="635000" cy="266700"/>
-          </a:xfrm>
-          <a:prstGeom prst="rect">
-            <a:avLst/>
-          </a:prstGeom>
-          <a:noFill/>
-          <a:ln>
-            <a:noFill/>
-          </a:ln>
-        </p:spPr>
-        <p:txBody>
-          <a:bodyPr/>
-          <a:p>
-            <a:pPr/>
-            <a:r>
-              <a:rPr lang="zh-CN" sz="1700" b="1">
-                <a:solidFill>
-                  <a:srgbClr val="C0392B"/>
-                </a:solidFill>
-                <a:latin typeface="Microsoft YaHei"/>
-                <a:ea typeface="Microsoft YaHei"/>
-              </a:rPr>
-              <a:t>4/4</a:t>
-            </a:r>
-            <a:endParaRPr lang="zh-CN" sz="1700" b="1">
-              <a:solidFill>
-                <a:srgbClr val="C0392B"/>
-              </a:solidFill>
-              <a:latin typeface="Microsoft YaHei"/>
-              <a:ea typeface="Microsoft YaHei"/>
-            </a:endParaRPr>
-          </a:p>
-        </p:txBody>
-      </p:sp>
-      <p:sp>
-        <p:nvSpPr>
-          <p:cNvPr id="164" name=""/>
-          <p:cNvSpPr/>
-          <p:nvPr/>
-        </p:nvSpPr>
-        <p:spPr>
-          <a:xfrm>
-            <a:off x="10515600" y="1346200"/>
-            <a:ext cx="1270000" cy="139700"/>
-          </a:xfrm>
-          <a:prstGeom prst="rect">
-            <a:avLst/>
-          </a:prstGeom>
-          <a:noFill/>
-          <a:ln>
-            <a:noFill/>
-          </a:ln>
-        </p:spPr>
-        <p:txBody>
-          <a:bodyPr/>
-          <a:p>
-            <a:pPr/>
-            <a:r>
-              <a:rPr lang="zh-CN" sz="900">
-                <a:solidFill>
-                  <a:srgbClr val="8A8A8A"/>
-                </a:solidFill>
-                <a:latin typeface="Microsoft YaHei"/>
-                <a:ea typeface="Microsoft YaHei"/>
-              </a:rPr>
-              <a:t>回撤均小于小盘指数</a:t>
-            </a:r>
-            <a:endParaRPr/>
-          </a:p>
-        </p:txBody>
-      </p:sp>
-      <p:sp>
-        <p:nvSpPr>
-          <p:cNvPr id="165" name=""/>
-          <p:cNvSpPr/>
-          <p:nvPr/>
-        </p:nvSpPr>
-        <p:spPr>
-          <a:xfrm>
-            <a:off x="533400" y="6438900"/>
+            <a:off x="533400" y="6344138"/>
             <a:ext cx="10096500" cy="342900"/>
           </a:xfrm>
           <a:prstGeom prst="rect">
@@ -19290,10 +18964,10 @@
         </p:spPr>
         <p:txBody>
           <a:bodyPr/>
+          <a:lstStyle/>
           <a:p>
-            <a:pPr/>
-            <a:r>
-              <a:rPr lang="zh-CN" sz="800">
+            <a:r>
+              <a:rPr lang="zh-CN" sz="800" dirty="0">
                 <a:solidFill>
                   <a:srgbClr val="8A8A8A"/>
                 </a:solidFill>
@@ -19302,25 +18976,24 @@
               </a:rPr>
               <a:t>数据来源：守正组合净值来自回测（2020-01-02 至 2026-09-30，日频，年化 1% 费率逐日计提，季度末再平衡）；对比指数行情来自 Wind。回撤为各事件峰值→谷值的最大回撤：俄乌冲突 2022-01-04→04-26、流动性危机 2024-01-02→02-05、贸易战 2025-03-18→04-07、美伊战争 2026-02-27→03-23。历史表现不预示未来，不构成投资建议。</a:t>
             </a:r>
-            <a:endParaRPr lang="zh-CN" sz="800">
-              <a:solidFill>
-                <a:srgbClr val="8A8A8A"/>
-              </a:solidFill>
-              <a:latin typeface="Microsoft YaHei"/>
-              <a:ea typeface="Microsoft YaHei"/>
-            </a:endParaRPr>
           </a:p>
         </p:txBody>
       </p:sp>
       <p:graphicFrame>
         <p:nvGraphicFramePr>
-          <p:cNvPr id="166" name=""/>
+          <p:cNvPr id="166" name="表格 165"/>
           <p:cNvGraphicFramePr/>
-          <p:nvPr/>
+          <p:nvPr>
+            <p:extLst>
+              <p:ext uri="{D42A27DB-BD31-4B8C-83A1-F6EECF244321}">
+                <p14:modId xmlns:p14="http://schemas.microsoft.com/office/powerpoint/2010/main" val="3688306964"/>
+              </p:ext>
+            </p:extLst>
+          </p:nvPr>
         </p:nvGraphicFramePr>
         <p:xfrm>
-          <a:off x="533400" y="1778000"/>
-          <a:ext cx="11125200" cy="4318000"/>
+          <a:off x="1008188" y="1956777"/>
+          <a:ext cx="9560166" cy="3767015"/>
         </p:xfrm>
         <a:graphic>
           <a:graphicData uri="http://schemas.openxmlformats.org/drawingml/2006/table">
@@ -19329,65 +19002,51 @@
                 <a:tableStyleId>{5C22544A-7EE6-4342-B048-85BDC9FD1C3A}</a:tableStyleId>
               </a:tblPr>
               <a:tblGrid>
-                <a:gridCol w="1589314">
+                <a:gridCol w="1365738">
                   <a:extLst>
-                    <a:ext uri="{9D8B030D-6E8A-4147-A177-3AD203B41FA5}">
-                      <a16:colId val="1"/>
-                    </a:ext>
+                    <a:ext uri="{9D8B030D-6E8A-4147-A177-3AD203B41FA5}"/>
                   </a:extLst>
                 </a:gridCol>
-                <a:gridCol w="1589314">
+                <a:gridCol w="1365738">
                   <a:extLst>
-                    <a:ext uri="{9D8B030D-6E8A-4147-A177-3AD203B41FA5}">
-                      <a16:colId val="2"/>
-                    </a:ext>
+                    <a:ext uri="{9D8B030D-6E8A-4147-A177-3AD203B41FA5}"/>
                   </a:extLst>
                 </a:gridCol>
-                <a:gridCol w="1589314">
+                <a:gridCol w="1365738">
                   <a:extLst>
-                    <a:ext uri="{9D8B030D-6E8A-4147-A177-3AD203B41FA5}">
-                      <a16:colId val="3"/>
-                    </a:ext>
+                    <a:ext uri="{9D8B030D-6E8A-4147-A177-3AD203B41FA5}"/>
                   </a:extLst>
                 </a:gridCol>
-                <a:gridCol w="1589314">
+                <a:gridCol w="1365738">
                   <a:extLst>
-                    <a:ext uri="{9D8B030D-6E8A-4147-A177-3AD203B41FA5}">
-                      <a16:colId val="4"/>
-                    </a:ext>
+                    <a:ext uri="{9D8B030D-6E8A-4147-A177-3AD203B41FA5}"/>
                   </a:extLst>
                 </a:gridCol>
-                <a:gridCol w="1589314">
+                <a:gridCol w="1365738">
                   <a:extLst>
-                    <a:ext uri="{9D8B030D-6E8A-4147-A177-3AD203B41FA5}">
-                      <a16:colId val="5"/>
-                    </a:ext>
+                    <a:ext uri="{9D8B030D-6E8A-4147-A177-3AD203B41FA5}"/>
                   </a:extLst>
                 </a:gridCol>
-                <a:gridCol w="1589314">
+                <a:gridCol w="1365738">
                   <a:extLst>
-                    <a:ext uri="{9D8B030D-6E8A-4147-A177-3AD203B41FA5}">
-                      <a16:colId val="6"/>
-                    </a:ext>
+                    <a:ext uri="{9D8B030D-6E8A-4147-A177-3AD203B41FA5}"/>
                   </a:extLst>
                 </a:gridCol>
-                <a:gridCol w="1589314">
+                <a:gridCol w="1365738">
                   <a:extLst>
-                    <a:ext uri="{9D8B030D-6E8A-4147-A177-3AD203B41FA5}">
-                      <a16:colId val="7"/>
-                    </a:ext>
+                    <a:ext uri="{9D8B030D-6E8A-4147-A177-3AD203B41FA5}"/>
                   </a:extLst>
                 </a:gridCol>
               </a:tblGrid>
-              <a:tr h="863600">
-                <a:tc>
-                  <a:txBody>
-                    <a:bodyPr/>
-                    <a:lstStyle/>
-                    <a:p>
-                      <a:pPr/>
-                      <a:r>
-                        <a:rPr lang="en-US" sz="1000" b="1">
+              <a:tr h="753403">
+                <a:tc>
+                  <a:txBody>
+                    <a:bodyPr/>
+                    <a:lstStyle/>
+                    <a:p>
+                      <a:pPr algn="ctr"/>
+                      <a:r>
+                        <a:rPr lang="en-US" sz="1100" b="1" dirty="0" err="1">
                           <a:solidFill>
                             <a:srgbClr val="FFFFFF"/>
                           </a:solidFill>
@@ -19396,7 +19055,7 @@
                         </a:rPr>
                         <a:t>事件</a:t>
                       </a:r>
-                      <a:endParaRPr lang="en-US" sz="1000" b="1">
+                      <a:endParaRPr lang="en-US" sz="1100" b="1" dirty="0">
                         <a:solidFill>
                           <a:srgbClr val="FFFFFF"/>
                         </a:solidFill>
@@ -19405,7 +19064,7 @@
                       </a:endParaRPr>
                     </a:p>
                   </a:txBody>
-                  <a:tcPr marL="38100" marR="38100" marT="25400" marB="25400">
+                  <a:tcPr marL="38100" marR="38100" marT="25400" marB="25400" anchor="ctr">
                     <a:lnL w="9525">
                       <a:solidFill>
                         <a:srgbClr val="D8DDE4"/>
@@ -19436,9 +19095,9 @@
                     <a:bodyPr/>
                     <a:lstStyle/>
                     <a:p>
-                      <a:pPr/>
-                      <a:r>
-                        <a:rPr lang="en-US" sz="1000" b="1">
+                      <a:pPr algn="ctr"/>
+                      <a:r>
+                        <a:rPr lang="en-US" sz="1100" b="1">
                           <a:solidFill>
                             <a:srgbClr val="FFFFFF"/>
                           </a:solidFill>
@@ -19447,16 +19106,9 @@
                         </a:rPr>
                         <a:t>守正组合</a:t>
                       </a:r>
-                      <a:endParaRPr lang="en-US" sz="1000" b="1">
-                        <a:solidFill>
-                          <a:srgbClr val="FFFFFF"/>
-                        </a:solidFill>
-                        <a:latin typeface="Microsoft YaHei"/>
-                        <a:ea typeface="Microsoft YaHei"/>
-                      </a:endParaRPr>
-                    </a:p>
-                  </a:txBody>
-                  <a:tcPr marL="38100" marR="38100" marT="25400" marB="25400">
+                    </a:p>
+                  </a:txBody>
+                  <a:tcPr marL="38100" marR="38100" marT="25400" marB="25400" anchor="ctr">
                     <a:lnL w="9525">
                       <a:solidFill>
                         <a:srgbClr val="D8DDE4"/>
@@ -19487,9 +19139,9 @@
                     <a:bodyPr/>
                     <a:lstStyle/>
                     <a:p>
-                      <a:pPr/>
-                      <a:r>
-                        <a:rPr lang="en-US" sz="1000" b="1">
+                      <a:pPr algn="ctr"/>
+                      <a:r>
+                        <a:rPr lang="en-US" sz="1100" b="1" dirty="0">
                           <a:solidFill>
                             <a:srgbClr val="FFFFFF"/>
                           </a:solidFill>
@@ -19498,16 +19150,9 @@
                         </a:rPr>
                         <a:t>中证1000</a:t>
                       </a:r>
-                      <a:endParaRPr lang="en-US" sz="1000" b="1">
-                        <a:solidFill>
-                          <a:srgbClr val="FFFFFF"/>
-                        </a:solidFill>
-                        <a:latin typeface="Microsoft YaHei"/>
-                        <a:ea typeface="Microsoft YaHei"/>
-                      </a:endParaRPr>
-                    </a:p>
-                  </a:txBody>
-                  <a:tcPr marL="38100" marR="38100" marT="25400" marB="25400">
+                    </a:p>
+                  </a:txBody>
+                  <a:tcPr marL="38100" marR="38100" marT="25400" marB="25400" anchor="ctr">
                     <a:lnL w="9525">
                       <a:solidFill>
                         <a:srgbClr val="D8DDE4"/>
@@ -19538,9 +19183,9 @@
                     <a:bodyPr/>
                     <a:lstStyle/>
                     <a:p>
-                      <a:pPr/>
-                      <a:r>
-                        <a:rPr lang="en-US" sz="1000" b="1">
+                      <a:pPr algn="ctr"/>
+                      <a:r>
+                        <a:rPr lang="en-US" sz="1100" b="1">
                           <a:solidFill>
                             <a:srgbClr val="FFFFFF"/>
                           </a:solidFill>
@@ -19549,16 +19194,9 @@
                         </a:rPr>
                         <a:t>中证2000</a:t>
                       </a:r>
-                      <a:endParaRPr lang="en-US" sz="1000" b="1">
-                        <a:solidFill>
-                          <a:srgbClr val="FFFFFF"/>
-                        </a:solidFill>
-                        <a:latin typeface="Microsoft YaHei"/>
-                        <a:ea typeface="Microsoft YaHei"/>
-                      </a:endParaRPr>
-                    </a:p>
-                  </a:txBody>
-                  <a:tcPr marL="38100" marR="38100" marT="25400" marB="25400">
+                    </a:p>
+                  </a:txBody>
+                  <a:tcPr marL="38100" marR="38100" marT="25400" marB="25400" anchor="ctr">
                     <a:lnL w="9525">
                       <a:solidFill>
                         <a:srgbClr val="D8DDE4"/>
@@ -19589,9 +19227,9 @@
                     <a:bodyPr/>
                     <a:lstStyle/>
                     <a:p>
-                      <a:pPr/>
-                      <a:r>
-                        <a:rPr lang="en-US" sz="1000" b="1">
+                      <a:pPr algn="ctr"/>
+                      <a:r>
+                        <a:rPr lang="en-US" sz="1100" b="1">
                           <a:solidFill>
                             <a:srgbClr val="FFFFFF"/>
                           </a:solidFill>
@@ -19600,16 +19238,9 @@
                         </a:rPr>
                         <a:t>创业板指</a:t>
                       </a:r>
-                      <a:endParaRPr lang="en-US" sz="1000" b="1">
-                        <a:solidFill>
-                          <a:srgbClr val="FFFFFF"/>
-                        </a:solidFill>
-                        <a:latin typeface="Microsoft YaHei"/>
-                        <a:ea typeface="Microsoft YaHei"/>
-                      </a:endParaRPr>
-                    </a:p>
-                  </a:txBody>
-                  <a:tcPr marL="38100" marR="38100" marT="25400" marB="25400">
+                    </a:p>
+                  </a:txBody>
+                  <a:tcPr marL="38100" marR="38100" marT="25400" marB="25400" anchor="ctr">
                     <a:lnL w="9525">
                       <a:solidFill>
                         <a:srgbClr val="D8DDE4"/>
@@ -19640,9 +19271,9 @@
                     <a:bodyPr/>
                     <a:lstStyle/>
                     <a:p>
-                      <a:pPr/>
-                      <a:r>
-                        <a:rPr lang="en-US" sz="1000" b="1">
+                      <a:pPr algn="ctr"/>
+                      <a:r>
+                        <a:rPr lang="en-US" sz="1100" b="1">
                           <a:solidFill>
                             <a:srgbClr val="FFFFFF"/>
                           </a:solidFill>
@@ -19651,16 +19282,9 @@
                         </a:rPr>
                         <a:t>科创50</a:t>
                       </a:r>
-                      <a:endParaRPr lang="en-US" sz="1000" b="1">
-                        <a:solidFill>
-                          <a:srgbClr val="FFFFFF"/>
-                        </a:solidFill>
-                        <a:latin typeface="Microsoft YaHei"/>
-                        <a:ea typeface="Microsoft YaHei"/>
-                      </a:endParaRPr>
-                    </a:p>
-                  </a:txBody>
-                  <a:tcPr marL="38100" marR="38100" marT="25400" marB="25400">
+                    </a:p>
+                  </a:txBody>
+                  <a:tcPr marL="38100" marR="38100" marT="25400" marB="25400" anchor="ctr">
                     <a:lnL w="9525">
                       <a:solidFill>
                         <a:srgbClr val="D8DDE4"/>
@@ -19691,9 +19315,9 @@
                     <a:bodyPr/>
                     <a:lstStyle/>
                     <a:p>
-                      <a:pPr/>
-                      <a:r>
-                        <a:rPr lang="en-US" sz="1000" b="1">
+                      <a:pPr algn="ctr"/>
+                      <a:r>
+                        <a:rPr lang="en-US" sz="1100" b="1">
                           <a:solidFill>
                             <a:srgbClr val="FFFFFF"/>
                           </a:solidFill>
@@ -19702,16 +19326,9 @@
                         </a:rPr>
                         <a:t>偏股基金</a:t>
                       </a:r>
-                      <a:endParaRPr lang="en-US" sz="1000" b="1">
-                        <a:solidFill>
-                          <a:srgbClr val="FFFFFF"/>
-                        </a:solidFill>
-                        <a:latin typeface="Microsoft YaHei"/>
-                        <a:ea typeface="Microsoft YaHei"/>
-                      </a:endParaRPr>
-                    </a:p>
-                  </a:txBody>
-                  <a:tcPr marL="38100" marR="38100" marT="25400" marB="25400">
+                    </a:p>
+                  </a:txBody>
+                  <a:tcPr marL="38100" marR="38100" marT="25400" marB="25400" anchor="ctr">
                     <a:lnL w="9525">
                       <a:solidFill>
                         <a:srgbClr val="D8DDE4"/>
@@ -19738,20 +19355,18 @@
                   </a:tcPr>
                 </a:tc>
                 <a:extLst>
-                  <a:ext uri="{0D108BD9-81ED-4DB2-BD59-A6C34878D82A}">
-                    <a16:rowId val="1"/>
-                  </a:ext>
+                  <a:ext uri="{0D108BD9-81ED-4DB2-BD59-A6C34878D82A}"/>
                 </a:extLst>
               </a:tr>
-              <a:tr h="863600">
-                <a:tc>
-                  <a:txBody>
-                    <a:bodyPr/>
-                    <a:lstStyle/>
-                    <a:p>
-                      <a:pPr/>
-                      <a:r>
-                        <a:rPr lang="en-US" sz="1000" b="1">
+              <a:tr h="753403">
+                <a:tc>
+                  <a:txBody>
+                    <a:bodyPr/>
+                    <a:lstStyle/>
+                    <a:p>
+                      <a:pPr algn="ctr"/>
+                      <a:r>
+                        <a:rPr lang="en-US" sz="1100" b="1">
                           <a:solidFill>
                             <a:srgbClr val="061F32"/>
                           </a:solidFill>
@@ -19760,16 +19375,9 @@
                         </a:rPr>
                         <a:t>俄乌冲突(22初)</a:t>
                       </a:r>
-                      <a:endParaRPr lang="en-US" sz="1000" b="1">
-                        <a:solidFill>
-                          <a:srgbClr val="061F32"/>
-                        </a:solidFill>
-                        <a:latin typeface="Microsoft YaHei"/>
-                        <a:ea typeface="Microsoft YaHei"/>
-                      </a:endParaRPr>
-                    </a:p>
-                  </a:txBody>
-                  <a:tcPr marL="38100" marR="38100" marT="25400" marB="25400">
+                    </a:p>
+                  </a:txBody>
+                  <a:tcPr marL="38100" marR="38100" marT="25400" marB="25400" anchor="ctr">
                     <a:lnL w="9525">
                       <a:solidFill>
                         <a:srgbClr val="D8DDE4"/>
@@ -19797,9 +19405,9 @@
                     <a:bodyPr/>
                     <a:lstStyle/>
                     <a:p>
-                      <a:pPr/>
-                      <a:r>
-                        <a:rPr lang="en-US" sz="1000" b="1">
+                      <a:pPr algn="ctr"/>
+                      <a:r>
+                        <a:rPr lang="en-US" sz="1100" b="1" dirty="0">
                           <a:solidFill>
                             <a:srgbClr val="061F32"/>
                           </a:solidFill>
@@ -19808,16 +19416,9 @@
                         </a:rPr>
                         <a:t>-24.0%</a:t>
                       </a:r>
-                      <a:endParaRPr lang="en-US" sz="1000" b="1">
-                        <a:solidFill>
-                          <a:srgbClr val="061F32"/>
-                        </a:solidFill>
-                        <a:latin typeface="Microsoft YaHei"/>
-                        <a:ea typeface="Microsoft YaHei"/>
-                      </a:endParaRPr>
-                    </a:p>
-                  </a:txBody>
-                  <a:tcPr marL="38100" marR="38100" marT="25400" marB="25400">
+                    </a:p>
+                  </a:txBody>
+                  <a:tcPr marL="38100" marR="38100" marT="25400" marB="25400" anchor="ctr">
                     <a:lnL w="9525">
                       <a:solidFill>
                         <a:srgbClr val="D8DDE4"/>
@@ -19845,9 +19446,9 @@
                     <a:bodyPr/>
                     <a:lstStyle/>
                     <a:p>
-                      <a:pPr/>
-                      <a:r>
-                        <a:rPr lang="en-US" sz="1000">
+                      <a:pPr algn="ctr"/>
+                      <a:r>
+                        <a:rPr lang="en-US" sz="1100" dirty="0">
                           <a:solidFill>
                             <a:srgbClr val="1A1A1A"/>
                           </a:solidFill>
@@ -19856,16 +19457,9 @@
                         </a:rPr>
                         <a:t>-34.0%</a:t>
                       </a:r>
-                      <a:endParaRPr lang="en-US" sz="1000">
-                        <a:solidFill>
-                          <a:srgbClr val="1A1A1A"/>
-                        </a:solidFill>
-                        <a:latin typeface="Microsoft YaHei"/>
-                        <a:ea typeface="Microsoft YaHei"/>
-                      </a:endParaRPr>
-                    </a:p>
-                  </a:txBody>
-                  <a:tcPr marL="38100" marR="38100" marT="25400" marB="25400">
+                    </a:p>
+                  </a:txBody>
+                  <a:tcPr marL="38100" marR="38100" marT="25400" marB="25400" anchor="ctr">
                     <a:lnL w="9525">
                       <a:solidFill>
                         <a:srgbClr val="D8DDE4"/>
@@ -19893,9 +19487,9 @@
                     <a:bodyPr/>
                     <a:lstStyle/>
                     <a:p>
-                      <a:pPr/>
-                      <a:r>
-                        <a:rPr lang="en-US" sz="1000">
+                      <a:pPr algn="ctr"/>
+                      <a:r>
+                        <a:rPr lang="en-US" sz="1100">
                           <a:solidFill>
                             <a:srgbClr val="1A1A1A"/>
                           </a:solidFill>
@@ -19904,16 +19498,9 @@
                         </a:rPr>
                         <a:t>-31.6%</a:t>
                       </a:r>
-                      <a:endParaRPr lang="en-US" sz="1000">
-                        <a:solidFill>
-                          <a:srgbClr val="1A1A1A"/>
-                        </a:solidFill>
-                        <a:latin typeface="Microsoft YaHei"/>
-                        <a:ea typeface="Microsoft YaHei"/>
-                      </a:endParaRPr>
-                    </a:p>
-                  </a:txBody>
-                  <a:tcPr marL="38100" marR="38100" marT="25400" marB="25400">
+                    </a:p>
+                  </a:txBody>
+                  <a:tcPr marL="38100" marR="38100" marT="25400" marB="25400" anchor="ctr">
                     <a:lnL w="9525">
                       <a:solidFill>
                         <a:srgbClr val="D8DDE4"/>
@@ -19941,9 +19528,9 @@
                     <a:bodyPr/>
                     <a:lstStyle/>
                     <a:p>
-                      <a:pPr/>
-                      <a:r>
-                        <a:rPr lang="en-US" sz="1000">
+                      <a:pPr algn="ctr"/>
+                      <a:r>
+                        <a:rPr lang="en-US" sz="1100">
                           <a:solidFill>
                             <a:srgbClr val="1A1A1A"/>
                           </a:solidFill>
@@ -19952,16 +19539,9 @@
                         </a:rPr>
                         <a:t>-33.8%</a:t>
                       </a:r>
-                      <a:endParaRPr lang="en-US" sz="1000">
-                        <a:solidFill>
-                          <a:srgbClr val="1A1A1A"/>
-                        </a:solidFill>
-                        <a:latin typeface="Microsoft YaHei"/>
-                        <a:ea typeface="Microsoft YaHei"/>
-                      </a:endParaRPr>
-                    </a:p>
-                  </a:txBody>
-                  <a:tcPr marL="38100" marR="38100" marT="25400" marB="25400">
+                    </a:p>
+                  </a:txBody>
+                  <a:tcPr marL="38100" marR="38100" marT="25400" marB="25400" anchor="ctr">
                     <a:lnL w="9525">
                       <a:solidFill>
                         <a:srgbClr val="D8DDE4"/>
@@ -19989,9 +19569,9 @@
                     <a:bodyPr/>
                     <a:lstStyle/>
                     <a:p>
-                      <a:pPr/>
-                      <a:r>
-                        <a:rPr lang="en-US" sz="1000">
+                      <a:pPr algn="ctr"/>
+                      <a:r>
+                        <a:rPr lang="en-US" sz="1100">
                           <a:solidFill>
                             <a:srgbClr val="1A1A1A"/>
                           </a:solidFill>
@@ -20000,16 +19580,9 @@
                         </a:rPr>
                         <a:t>-36.4%</a:t>
                       </a:r>
-                      <a:endParaRPr lang="en-US" sz="1000">
-                        <a:solidFill>
-                          <a:srgbClr val="1A1A1A"/>
-                        </a:solidFill>
-                        <a:latin typeface="Microsoft YaHei"/>
-                        <a:ea typeface="Microsoft YaHei"/>
-                      </a:endParaRPr>
-                    </a:p>
-                  </a:txBody>
-                  <a:tcPr marL="38100" marR="38100" marT="25400" marB="25400">
+                    </a:p>
+                  </a:txBody>
+                  <a:tcPr marL="38100" marR="38100" marT="25400" marB="25400" anchor="ctr">
                     <a:lnL w="9525">
                       <a:solidFill>
                         <a:srgbClr val="D8DDE4"/>
@@ -20037,9 +19610,9 @@
                     <a:bodyPr/>
                     <a:lstStyle/>
                     <a:p>
-                      <a:pPr/>
-                      <a:r>
-                        <a:rPr lang="en-US" sz="1000">
+                      <a:pPr algn="ctr"/>
+                      <a:r>
+                        <a:rPr lang="en-US" sz="1100">
                           <a:solidFill>
                             <a:srgbClr val="1A1A1A"/>
                           </a:solidFill>
@@ -20048,16 +19621,9 @@
                         </a:rPr>
                         <a:t>-26.7%</a:t>
                       </a:r>
-                      <a:endParaRPr lang="en-US" sz="1000">
-                        <a:solidFill>
-                          <a:srgbClr val="1A1A1A"/>
-                        </a:solidFill>
-                        <a:latin typeface="Microsoft YaHei"/>
-                        <a:ea typeface="Microsoft YaHei"/>
-                      </a:endParaRPr>
-                    </a:p>
-                  </a:txBody>
-                  <a:tcPr marL="38100" marR="38100" marT="25400" marB="25400">
+                    </a:p>
+                  </a:txBody>
+                  <a:tcPr marL="38100" marR="38100" marT="25400" marB="25400" anchor="ctr">
                     <a:lnL w="9525">
                       <a:solidFill>
                         <a:srgbClr val="D8DDE4"/>
@@ -20081,20 +19647,18 @@
                   </a:tcPr>
                 </a:tc>
                 <a:extLst>
-                  <a:ext uri="{0D108BD9-81ED-4DB2-BD59-A6C34878D82A}">
-                    <a16:rowId val="2"/>
-                  </a:ext>
+                  <a:ext uri="{0D108BD9-81ED-4DB2-BD59-A6C34878D82A}"/>
                 </a:extLst>
               </a:tr>
-              <a:tr h="863600">
-                <a:tc>
-                  <a:txBody>
-                    <a:bodyPr/>
-                    <a:lstStyle/>
-                    <a:p>
-                      <a:pPr/>
-                      <a:r>
-                        <a:rPr lang="en-US" sz="1000" b="1">
+              <a:tr h="753403">
+                <a:tc>
+                  <a:txBody>
+                    <a:bodyPr/>
+                    <a:lstStyle/>
+                    <a:p>
+                      <a:pPr algn="ctr"/>
+                      <a:r>
+                        <a:rPr lang="en-US" sz="1100" b="1">
                           <a:solidFill>
                             <a:srgbClr val="061F32"/>
                           </a:solidFill>
@@ -20103,16 +19667,9 @@
                         </a:rPr>
                         <a:t>流动性危机(24.01)</a:t>
                       </a:r>
-                      <a:endParaRPr lang="en-US" sz="1000" b="1">
-                        <a:solidFill>
-                          <a:srgbClr val="061F32"/>
-                        </a:solidFill>
-                        <a:latin typeface="Microsoft YaHei"/>
-                        <a:ea typeface="Microsoft YaHei"/>
-                      </a:endParaRPr>
-                    </a:p>
-                  </a:txBody>
-                  <a:tcPr marL="38100" marR="38100" marT="25400" marB="25400">
+                    </a:p>
+                  </a:txBody>
+                  <a:tcPr marL="38100" marR="38100" marT="25400" marB="25400" anchor="ctr">
                     <a:lnL w="9525">
                       <a:solidFill>
                         <a:srgbClr val="D8DDE4"/>
@@ -20143,9 +19700,9 @@
                     <a:bodyPr/>
                     <a:lstStyle/>
                     <a:p>
-                      <a:pPr/>
-                      <a:r>
-                        <a:rPr lang="en-US" sz="1000" b="1">
+                      <a:pPr algn="ctr"/>
+                      <a:r>
+                        <a:rPr lang="en-US" sz="1100" b="1" dirty="0">
                           <a:solidFill>
                             <a:srgbClr val="061F32"/>
                           </a:solidFill>
@@ -20154,16 +19711,9 @@
                         </a:rPr>
                         <a:t>-12.8%</a:t>
                       </a:r>
-                      <a:endParaRPr lang="en-US" sz="1000" b="1">
-                        <a:solidFill>
-                          <a:srgbClr val="061F32"/>
-                        </a:solidFill>
-                        <a:latin typeface="Microsoft YaHei"/>
-                        <a:ea typeface="Microsoft YaHei"/>
-                      </a:endParaRPr>
-                    </a:p>
-                  </a:txBody>
-                  <a:tcPr marL="38100" marR="38100" marT="25400" marB="25400">
+                    </a:p>
+                  </a:txBody>
+                  <a:tcPr marL="38100" marR="38100" marT="25400" marB="25400" anchor="ctr">
                     <a:lnL w="9525">
                       <a:solidFill>
                         <a:srgbClr val="D8DDE4"/>
@@ -20194,9 +19744,9 @@
                     <a:bodyPr/>
                     <a:lstStyle/>
                     <a:p>
-                      <a:pPr/>
-                      <a:r>
-                        <a:rPr lang="en-US" sz="1000">
+                      <a:pPr algn="ctr"/>
+                      <a:r>
+                        <a:rPr lang="en-US" sz="1100" dirty="0">
                           <a:solidFill>
                             <a:srgbClr val="1A1A1A"/>
                           </a:solidFill>
@@ -20205,16 +19755,9 @@
                         </a:rPr>
                         <a:t>-26.7%</a:t>
                       </a:r>
-                      <a:endParaRPr lang="en-US" sz="1000">
-                        <a:solidFill>
-                          <a:srgbClr val="1A1A1A"/>
-                        </a:solidFill>
-                        <a:latin typeface="Microsoft YaHei"/>
-                        <a:ea typeface="Microsoft YaHei"/>
-                      </a:endParaRPr>
-                    </a:p>
-                  </a:txBody>
-                  <a:tcPr marL="38100" marR="38100" marT="25400" marB="25400">
+                    </a:p>
+                  </a:txBody>
+                  <a:tcPr marL="38100" marR="38100" marT="25400" marB="25400" anchor="ctr">
                     <a:lnL w="9525">
                       <a:solidFill>
                         <a:srgbClr val="D8DDE4"/>
@@ -20245,9 +19788,9 @@
                     <a:bodyPr/>
                     <a:lstStyle/>
                     <a:p>
-                      <a:pPr/>
-                      <a:r>
-                        <a:rPr lang="en-US" sz="1000">
+                      <a:pPr algn="ctr"/>
+                      <a:r>
+                        <a:rPr lang="en-US" sz="1100" dirty="0">
                           <a:solidFill>
                             <a:srgbClr val="1A1A1A"/>
                           </a:solidFill>
@@ -20256,16 +19799,9 @@
                         </a:rPr>
                         <a:t>-33.4%</a:t>
                       </a:r>
-                      <a:endParaRPr lang="en-US" sz="1000">
-                        <a:solidFill>
-                          <a:srgbClr val="1A1A1A"/>
-                        </a:solidFill>
-                        <a:latin typeface="Microsoft YaHei"/>
-                        <a:ea typeface="Microsoft YaHei"/>
-                      </a:endParaRPr>
-                    </a:p>
-                  </a:txBody>
-                  <a:tcPr marL="38100" marR="38100" marT="25400" marB="25400">
+                    </a:p>
+                  </a:txBody>
+                  <a:tcPr marL="38100" marR="38100" marT="25400" marB="25400" anchor="ctr">
                     <a:lnL w="9525">
                       <a:solidFill>
                         <a:srgbClr val="D8DDE4"/>
@@ -20296,9 +19832,9 @@
                     <a:bodyPr/>
                     <a:lstStyle/>
                     <a:p>
-                      <a:pPr/>
-                      <a:r>
-                        <a:rPr lang="en-US" sz="1000">
+                      <a:pPr algn="ctr"/>
+                      <a:r>
+                        <a:rPr lang="en-US" sz="1100">
                           <a:solidFill>
                             <a:srgbClr val="1A1A1A"/>
                           </a:solidFill>
@@ -20307,16 +19843,9 @@
                         </a:rPr>
                         <a:t>-16.5%</a:t>
                       </a:r>
-                      <a:endParaRPr lang="en-US" sz="1000">
-                        <a:solidFill>
-                          <a:srgbClr val="1A1A1A"/>
-                        </a:solidFill>
-                        <a:latin typeface="Microsoft YaHei"/>
-                        <a:ea typeface="Microsoft YaHei"/>
-                      </a:endParaRPr>
-                    </a:p>
-                  </a:txBody>
-                  <a:tcPr marL="38100" marR="38100" marT="25400" marB="25400">
+                    </a:p>
+                  </a:txBody>
+                  <a:tcPr marL="38100" marR="38100" marT="25400" marB="25400" anchor="ctr">
                     <a:lnL w="9525">
                       <a:solidFill>
                         <a:srgbClr val="D8DDE4"/>
@@ -20347,9 +19876,9 @@
                     <a:bodyPr/>
                     <a:lstStyle/>
                     <a:p>
-                      <a:pPr/>
-                      <a:r>
-                        <a:rPr lang="en-US" sz="1000">
+                      <a:pPr algn="ctr"/>
+                      <a:r>
+                        <a:rPr lang="en-US" sz="1100">
                           <a:solidFill>
                             <a:srgbClr val="1A1A1A"/>
                           </a:solidFill>
@@ -20358,16 +19887,9 @@
                         </a:rPr>
                         <a:t>-19.8%</a:t>
                       </a:r>
-                      <a:endParaRPr lang="en-US" sz="1000">
-                        <a:solidFill>
-                          <a:srgbClr val="1A1A1A"/>
-                        </a:solidFill>
-                        <a:latin typeface="Microsoft YaHei"/>
-                        <a:ea typeface="Microsoft YaHei"/>
-                      </a:endParaRPr>
-                    </a:p>
-                  </a:txBody>
-                  <a:tcPr marL="38100" marR="38100" marT="25400" marB="25400">
+                    </a:p>
+                  </a:txBody>
+                  <a:tcPr marL="38100" marR="38100" marT="25400" marB="25400" anchor="ctr">
                     <a:lnL w="9525">
                       <a:solidFill>
                         <a:srgbClr val="D8DDE4"/>
@@ -20398,9 +19920,9 @@
                     <a:bodyPr/>
                     <a:lstStyle/>
                     <a:p>
-                      <a:pPr/>
-                      <a:r>
-                        <a:rPr lang="en-US" sz="1000">
+                      <a:pPr algn="ctr"/>
+                      <a:r>
+                        <a:rPr lang="en-US" sz="1100">
                           <a:solidFill>
                             <a:srgbClr val="1A1A1A"/>
                           </a:solidFill>
@@ -20409,16 +19931,9 @@
                         </a:rPr>
                         <a:t>-14.5%</a:t>
                       </a:r>
-                      <a:endParaRPr lang="en-US" sz="1000">
-                        <a:solidFill>
-                          <a:srgbClr val="1A1A1A"/>
-                        </a:solidFill>
-                        <a:latin typeface="Microsoft YaHei"/>
-                        <a:ea typeface="Microsoft YaHei"/>
-                      </a:endParaRPr>
-                    </a:p>
-                  </a:txBody>
-                  <a:tcPr marL="38100" marR="38100" marT="25400" marB="25400">
+                    </a:p>
+                  </a:txBody>
+                  <a:tcPr marL="38100" marR="38100" marT="25400" marB="25400" anchor="ctr">
                     <a:lnL w="9525">
                       <a:solidFill>
                         <a:srgbClr val="D8DDE4"/>
@@ -20445,20 +19960,18 @@
                   </a:tcPr>
                 </a:tc>
                 <a:extLst>
-                  <a:ext uri="{0D108BD9-81ED-4DB2-BD59-A6C34878D82A}">
-                    <a16:rowId val="3"/>
-                  </a:ext>
+                  <a:ext uri="{0D108BD9-81ED-4DB2-BD59-A6C34878D82A}"/>
                 </a:extLst>
               </a:tr>
-              <a:tr h="863600">
-                <a:tc>
-                  <a:txBody>
-                    <a:bodyPr/>
-                    <a:lstStyle/>
-                    <a:p>
-                      <a:pPr/>
-                      <a:r>
-                        <a:rPr lang="en-US" sz="1000" b="1">
+              <a:tr h="753403">
+                <a:tc>
+                  <a:txBody>
+                    <a:bodyPr/>
+                    <a:lstStyle/>
+                    <a:p>
+                      <a:pPr algn="ctr"/>
+                      <a:r>
+                        <a:rPr lang="en-US" sz="1100" b="1">
                           <a:solidFill>
                             <a:srgbClr val="061F32"/>
                           </a:solidFill>
@@ -20467,16 +19980,9 @@
                         </a:rPr>
                         <a:t>贸易战(25.04)</a:t>
                       </a:r>
-                      <a:endParaRPr lang="en-US" sz="1000" b="1">
-                        <a:solidFill>
-                          <a:srgbClr val="061F32"/>
-                        </a:solidFill>
-                        <a:latin typeface="Microsoft YaHei"/>
-                        <a:ea typeface="Microsoft YaHei"/>
-                      </a:endParaRPr>
-                    </a:p>
-                  </a:txBody>
-                  <a:tcPr marL="38100" marR="38100" marT="25400" marB="25400">
+                    </a:p>
+                  </a:txBody>
+                  <a:tcPr marL="38100" marR="38100" marT="25400" marB="25400" anchor="ctr">
                     <a:lnL w="9525">
                       <a:solidFill>
                         <a:srgbClr val="D8DDE4"/>
@@ -20504,9 +20010,9 @@
                     <a:bodyPr/>
                     <a:lstStyle/>
                     <a:p>
-                      <a:pPr/>
-                      <a:r>
-                        <a:rPr lang="en-US" sz="1000" b="1">
+                      <a:pPr algn="ctr"/>
+                      <a:r>
+                        <a:rPr lang="en-US" sz="1100" b="1" dirty="0">
                           <a:solidFill>
                             <a:srgbClr val="061F32"/>
                           </a:solidFill>
@@ -20515,16 +20021,9 @@
                         </a:rPr>
                         <a:t>-11.4%</a:t>
                       </a:r>
-                      <a:endParaRPr lang="en-US" sz="1000" b="1">
-                        <a:solidFill>
-                          <a:srgbClr val="061F32"/>
-                        </a:solidFill>
-                        <a:latin typeface="Microsoft YaHei"/>
-                        <a:ea typeface="Microsoft YaHei"/>
-                      </a:endParaRPr>
-                    </a:p>
-                  </a:txBody>
-                  <a:tcPr marL="38100" marR="38100" marT="25400" marB="25400">
+                    </a:p>
+                  </a:txBody>
+                  <a:tcPr marL="38100" marR="38100" marT="25400" marB="25400" anchor="ctr">
                     <a:lnL w="9525">
                       <a:solidFill>
                         <a:srgbClr val="D8DDE4"/>
@@ -20552,9 +20051,9 @@
                     <a:bodyPr/>
                     <a:lstStyle/>
                     <a:p>
-                      <a:pPr/>
-                      <a:r>
-                        <a:rPr lang="en-US" sz="1000">
+                      <a:pPr algn="ctr"/>
+                      <a:r>
+                        <a:rPr lang="en-US" sz="1100">
                           <a:solidFill>
                             <a:srgbClr val="1A1A1A"/>
                           </a:solidFill>
@@ -20563,16 +20062,9 @@
                         </a:rPr>
                         <a:t>-16.9%</a:t>
                       </a:r>
-                      <a:endParaRPr lang="en-US" sz="1000">
-                        <a:solidFill>
-                          <a:srgbClr val="1A1A1A"/>
-                        </a:solidFill>
-                        <a:latin typeface="Microsoft YaHei"/>
-                        <a:ea typeface="Microsoft YaHei"/>
-                      </a:endParaRPr>
-                    </a:p>
-                  </a:txBody>
-                  <a:tcPr marL="38100" marR="38100" marT="25400" marB="25400">
+                    </a:p>
+                  </a:txBody>
+                  <a:tcPr marL="38100" marR="38100" marT="25400" marB="25400" anchor="ctr">
                     <a:lnL w="9525">
                       <a:solidFill>
                         <a:srgbClr val="D8DDE4"/>
@@ -20600,9 +20092,9 @@
                     <a:bodyPr/>
                     <a:lstStyle/>
                     <a:p>
-                      <a:pPr/>
-                      <a:r>
-                        <a:rPr lang="en-US" sz="1000">
+                      <a:pPr algn="ctr"/>
+                      <a:r>
+                        <a:rPr lang="en-US" sz="1100" dirty="0">
                           <a:solidFill>
                             <a:srgbClr val="1A1A1A"/>
                           </a:solidFill>
@@ -20611,16 +20103,9 @@
                         </a:rPr>
                         <a:t>-19.6%</a:t>
                       </a:r>
-                      <a:endParaRPr lang="en-US" sz="1000">
-                        <a:solidFill>
-                          <a:srgbClr val="1A1A1A"/>
-                        </a:solidFill>
-                        <a:latin typeface="Microsoft YaHei"/>
-                        <a:ea typeface="Microsoft YaHei"/>
-                      </a:endParaRPr>
-                    </a:p>
-                  </a:txBody>
-                  <a:tcPr marL="38100" marR="38100" marT="25400" marB="25400">
+                    </a:p>
+                  </a:txBody>
+                  <a:tcPr marL="38100" marR="38100" marT="25400" marB="25400" anchor="ctr">
                     <a:lnL w="9525">
                       <a:solidFill>
                         <a:srgbClr val="D8DDE4"/>
@@ -20648,9 +20133,9 @@
                     <a:bodyPr/>
                     <a:lstStyle/>
                     <a:p>
-                      <a:pPr/>
-                      <a:r>
-                        <a:rPr lang="en-US" sz="1000">
+                      <a:pPr algn="ctr"/>
+                      <a:r>
+                        <a:rPr lang="en-US" sz="1100" dirty="0">
                           <a:solidFill>
                             <a:srgbClr val="1A1A1A"/>
                           </a:solidFill>
@@ -20659,16 +20144,9 @@
                         </a:rPr>
                         <a:t>-18.9%</a:t>
                       </a:r>
-                      <a:endParaRPr lang="en-US" sz="1000">
-                        <a:solidFill>
-                          <a:srgbClr val="1A1A1A"/>
-                        </a:solidFill>
-                        <a:latin typeface="Microsoft YaHei"/>
-                        <a:ea typeface="Microsoft YaHei"/>
-                      </a:endParaRPr>
-                    </a:p>
-                  </a:txBody>
-                  <a:tcPr marL="38100" marR="38100" marT="25400" marB="25400">
+                    </a:p>
+                  </a:txBody>
+                  <a:tcPr marL="38100" marR="38100" marT="25400" marB="25400" anchor="ctr">
                     <a:lnL w="9525">
                       <a:solidFill>
                         <a:srgbClr val="D8DDE4"/>
@@ -20696,9 +20174,9 @@
                     <a:bodyPr/>
                     <a:lstStyle/>
                     <a:p>
-                      <a:pPr/>
-                      <a:r>
-                        <a:rPr lang="en-US" sz="1000">
+                      <a:pPr algn="ctr"/>
+                      <a:r>
+                        <a:rPr lang="en-US" sz="1100" dirty="0">
                           <a:solidFill>
                             <a:srgbClr val="1A1A1A"/>
                           </a:solidFill>
@@ -20707,16 +20185,9 @@
                         </a:rPr>
                         <a:t>-15.2%</a:t>
                       </a:r>
-                      <a:endParaRPr lang="en-US" sz="1000">
-                        <a:solidFill>
-                          <a:srgbClr val="1A1A1A"/>
-                        </a:solidFill>
-                        <a:latin typeface="Microsoft YaHei"/>
-                        <a:ea typeface="Microsoft YaHei"/>
-                      </a:endParaRPr>
-                    </a:p>
-                  </a:txBody>
-                  <a:tcPr marL="38100" marR="38100" marT="25400" marB="25400">
+                    </a:p>
+                  </a:txBody>
+                  <a:tcPr marL="38100" marR="38100" marT="25400" marB="25400" anchor="ctr">
                     <a:lnL w="9525">
                       <a:solidFill>
                         <a:srgbClr val="D8DDE4"/>
@@ -20744,9 +20215,9 @@
                     <a:bodyPr/>
                     <a:lstStyle/>
                     <a:p>
-                      <a:pPr/>
-                      <a:r>
-                        <a:rPr lang="en-US" sz="1000">
+                      <a:pPr algn="ctr"/>
+                      <a:r>
+                        <a:rPr lang="en-US" sz="1100" dirty="0">
                           <a:solidFill>
                             <a:srgbClr val="1A1A1A"/>
                           </a:solidFill>
@@ -20755,16 +20226,9 @@
                         </a:rPr>
                         <a:t>-13.1%</a:t>
                       </a:r>
-                      <a:endParaRPr lang="en-US" sz="1000">
-                        <a:solidFill>
-                          <a:srgbClr val="1A1A1A"/>
-                        </a:solidFill>
-                        <a:latin typeface="Microsoft YaHei"/>
-                        <a:ea typeface="Microsoft YaHei"/>
-                      </a:endParaRPr>
-                    </a:p>
-                  </a:txBody>
-                  <a:tcPr marL="38100" marR="38100" marT="25400" marB="25400">
+                    </a:p>
+                  </a:txBody>
+                  <a:tcPr marL="38100" marR="38100" marT="25400" marB="25400" anchor="ctr">
                     <a:lnL w="9525">
                       <a:solidFill>
                         <a:srgbClr val="D8DDE4"/>
@@ -20788,20 +20252,18 @@
                   </a:tcPr>
                 </a:tc>
                 <a:extLst>
-                  <a:ext uri="{0D108BD9-81ED-4DB2-BD59-A6C34878D82A}">
-                    <a16:rowId val="4"/>
-                  </a:ext>
+                  <a:ext uri="{0D108BD9-81ED-4DB2-BD59-A6C34878D82A}"/>
                 </a:extLst>
               </a:tr>
-              <a:tr h="863600">
-                <a:tc>
-                  <a:txBody>
-                    <a:bodyPr/>
-                    <a:lstStyle/>
-                    <a:p>
-                      <a:pPr/>
-                      <a:r>
-                        <a:rPr lang="en-US" sz="1000" b="1">
+              <a:tr h="753403">
+                <a:tc>
+                  <a:txBody>
+                    <a:bodyPr/>
+                    <a:lstStyle/>
+                    <a:p>
+                      <a:pPr algn="ctr"/>
+                      <a:r>
+                        <a:rPr lang="en-US" sz="1100" b="1">
                           <a:solidFill>
                             <a:srgbClr val="061F32"/>
                           </a:solidFill>
@@ -20810,16 +20272,9 @@
                         </a:rPr>
                         <a:t>美伊战争(26.03)</a:t>
                       </a:r>
-                      <a:endParaRPr lang="en-US" sz="1000" b="1">
-                        <a:solidFill>
-                          <a:srgbClr val="061F32"/>
-                        </a:solidFill>
-                        <a:latin typeface="Microsoft YaHei"/>
-                        <a:ea typeface="Microsoft YaHei"/>
-                      </a:endParaRPr>
-                    </a:p>
-                  </a:txBody>
-                  <a:tcPr marL="38100" marR="38100" marT="25400" marB="25400">
+                    </a:p>
+                  </a:txBody>
+                  <a:tcPr marL="38100" marR="38100" marT="25400" marB="25400" anchor="ctr">
                     <a:lnL w="9525">
                       <a:solidFill>
                         <a:srgbClr val="D8DDE4"/>
@@ -20850,9 +20305,9 @@
                     <a:bodyPr/>
                     <a:lstStyle/>
                     <a:p>
-                      <a:pPr/>
-                      <a:r>
-                        <a:rPr lang="en-US" sz="1000" b="1">
+                      <a:pPr algn="ctr"/>
+                      <a:r>
+                        <a:rPr lang="en-US" sz="1100" b="1" dirty="0">
                           <a:solidFill>
                             <a:srgbClr val="061F32"/>
                           </a:solidFill>
@@ -20861,16 +20316,9 @@
                         </a:rPr>
                         <a:t>-10.3%</a:t>
                       </a:r>
-                      <a:endParaRPr lang="en-US" sz="1000" b="1">
-                        <a:solidFill>
-                          <a:srgbClr val="061F32"/>
-                        </a:solidFill>
-                        <a:latin typeface="Microsoft YaHei"/>
-                        <a:ea typeface="Microsoft YaHei"/>
-                      </a:endParaRPr>
-                    </a:p>
-                  </a:txBody>
-                  <a:tcPr marL="38100" marR="38100" marT="25400" marB="25400">
+                    </a:p>
+                  </a:txBody>
+                  <a:tcPr marL="38100" marR="38100" marT="25400" marB="25400" anchor="ctr">
                     <a:lnL w="9525">
                       <a:solidFill>
                         <a:srgbClr val="D8DDE4"/>
@@ -20901,9 +20349,9 @@
                     <a:bodyPr/>
                     <a:lstStyle/>
                     <a:p>
-                      <a:pPr/>
-                      <a:r>
-                        <a:rPr lang="en-US" sz="1000">
+                      <a:pPr algn="ctr"/>
+                      <a:r>
+                        <a:rPr lang="en-US" sz="1100">
                           <a:solidFill>
                             <a:srgbClr val="1A1A1A"/>
                           </a:solidFill>
@@ -20912,16 +20360,9 @@
                         </a:rPr>
                         <a:t>-13.5%</a:t>
                       </a:r>
-                      <a:endParaRPr lang="en-US" sz="1000">
-                        <a:solidFill>
-                          <a:srgbClr val="1A1A1A"/>
-                        </a:solidFill>
-                        <a:latin typeface="Microsoft YaHei"/>
-                        <a:ea typeface="Microsoft YaHei"/>
-                      </a:endParaRPr>
-                    </a:p>
-                  </a:txBody>
-                  <a:tcPr marL="38100" marR="38100" marT="25400" marB="25400">
+                    </a:p>
+                  </a:txBody>
+                  <a:tcPr marL="38100" marR="38100" marT="25400" marB="25400" anchor="ctr">
                     <a:lnL w="9525">
                       <a:solidFill>
                         <a:srgbClr val="D8DDE4"/>
@@ -20952,9 +20393,9 @@
                     <a:bodyPr/>
                     <a:lstStyle/>
                     <a:p>
-                      <a:pPr/>
-                      <a:r>
-                        <a:rPr lang="en-US" sz="1000">
+                      <a:pPr algn="ctr"/>
+                      <a:r>
+                        <a:rPr lang="en-US" sz="1100">
                           <a:solidFill>
                             <a:srgbClr val="1A1A1A"/>
                           </a:solidFill>
@@ -20963,16 +20404,9 @@
                         </a:rPr>
                         <a:t>-14.7%</a:t>
                       </a:r>
-                      <a:endParaRPr lang="en-US" sz="1000">
-                        <a:solidFill>
-                          <a:srgbClr val="1A1A1A"/>
-                        </a:solidFill>
-                        <a:latin typeface="Microsoft YaHei"/>
-                        <a:ea typeface="Microsoft YaHei"/>
-                      </a:endParaRPr>
-                    </a:p>
-                  </a:txBody>
-                  <a:tcPr marL="38100" marR="38100" marT="25400" marB="25400">
+                    </a:p>
+                  </a:txBody>
+                  <a:tcPr marL="38100" marR="38100" marT="25400" marB="25400" anchor="ctr">
                     <a:lnL w="9525">
                       <a:solidFill>
                         <a:srgbClr val="D8DDE4"/>
@@ -21003,9 +20437,9 @@
                     <a:bodyPr/>
                     <a:lstStyle/>
                     <a:p>
-                      <a:pPr/>
-                      <a:r>
-                        <a:rPr lang="en-US" sz="1000">
+                      <a:pPr algn="ctr"/>
+                      <a:r>
+                        <a:rPr lang="en-US" sz="1100" dirty="0">
                           <a:solidFill>
                             <a:srgbClr val="1A1A1A"/>
                           </a:solidFill>
@@ -21014,16 +20448,9 @@
                         </a:rPr>
                         <a:t>-6.2%</a:t>
                       </a:r>
-                      <a:endParaRPr lang="en-US" sz="1000">
-                        <a:solidFill>
-                          <a:srgbClr val="1A1A1A"/>
-                        </a:solidFill>
-                        <a:latin typeface="Microsoft YaHei"/>
-                        <a:ea typeface="Microsoft YaHei"/>
-                      </a:endParaRPr>
-                    </a:p>
-                  </a:txBody>
-                  <a:tcPr marL="38100" marR="38100" marT="25400" marB="25400">
+                    </a:p>
+                  </a:txBody>
+                  <a:tcPr marL="38100" marR="38100" marT="25400" marB="25400" anchor="ctr">
                     <a:lnL w="9525">
                       <a:solidFill>
                         <a:srgbClr val="D8DDE4"/>
@@ -21054,9 +20481,9 @@
                     <a:bodyPr/>
                     <a:lstStyle/>
                     <a:p>
-                      <a:pPr/>
-                      <a:r>
-                        <a:rPr lang="en-US" sz="1000">
+                      <a:pPr algn="ctr"/>
+                      <a:r>
+                        <a:rPr lang="en-US" sz="1100" dirty="0">
                           <a:solidFill>
                             <a:srgbClr val="1A1A1A"/>
                           </a:solidFill>
@@ -21065,16 +20492,9 @@
                         </a:rPr>
                         <a:t>-15.6%</a:t>
                       </a:r>
-                      <a:endParaRPr lang="en-US" sz="1000">
-                        <a:solidFill>
-                          <a:srgbClr val="1A1A1A"/>
-                        </a:solidFill>
-                        <a:latin typeface="Microsoft YaHei"/>
-                        <a:ea typeface="Microsoft YaHei"/>
-                      </a:endParaRPr>
-                    </a:p>
-                  </a:txBody>
-                  <a:tcPr marL="38100" marR="38100" marT="25400" marB="25400">
+                    </a:p>
+                  </a:txBody>
+                  <a:tcPr marL="38100" marR="38100" marT="25400" marB="25400" anchor="ctr">
                     <a:lnL w="9525">
                       <a:solidFill>
                         <a:srgbClr val="D8DDE4"/>
@@ -21105,9 +20525,9 @@
                     <a:bodyPr/>
                     <a:lstStyle/>
                     <a:p>
-                      <a:pPr/>
-                      <a:r>
-                        <a:rPr lang="en-US" sz="1000">
+                      <a:pPr algn="ctr"/>
+                      <a:r>
+                        <a:rPr lang="en-US" sz="1100" dirty="0">
                           <a:solidFill>
                             <a:srgbClr val="1A1A1A"/>
                           </a:solidFill>
@@ -21116,16 +20536,9 @@
                         </a:rPr>
                         <a:t>-9.3%</a:t>
                       </a:r>
-                      <a:endParaRPr lang="en-US" sz="1000">
-                        <a:solidFill>
-                          <a:srgbClr val="1A1A1A"/>
-                        </a:solidFill>
-                        <a:latin typeface="Microsoft YaHei"/>
-                        <a:ea typeface="Microsoft YaHei"/>
-                      </a:endParaRPr>
-                    </a:p>
-                  </a:txBody>
-                  <a:tcPr marL="38100" marR="38100" marT="25400" marB="25400">
+                    </a:p>
+                  </a:txBody>
+                  <a:tcPr marL="38100" marR="38100" marT="25400" marB="25400" anchor="ctr">
                     <a:lnL w="9525">
                       <a:solidFill>
                         <a:srgbClr val="D8DDE4"/>
@@ -21152,9 +20565,7 @@
                   </a:tcPr>
                 </a:tc>
                 <a:extLst>
-                  <a:ext uri="{0D108BD9-81ED-4DB2-BD59-A6C34878D82A}">
-                    <a16:rowId val="5"/>
-                  </a:ext>
+                  <a:ext uri="{0D108BD9-81ED-4DB2-BD59-A6C34878D82A}"/>
                 </a:extLst>
               </a:tr>
             </a:tbl>
@@ -21163,15 +20574,18 @@
       </p:graphicFrame>
     </p:spTree>
   </p:cSld>
+  <p:clrMapOvr>
+    <a:masterClrMapping/>
+  </p:clrMapOvr>
 </p:sld>
 </file>
 
 <file path=ppt/slides/slide9.xml><?xml version="1.0" encoding="utf-8"?>
-<p:sld xmlns:a16="http://schemas.microsoft.com/office/drawing/2014/main" xmlns:p="http://schemas.openxmlformats.org/presentationml/2006/main" xmlns:a="http://schemas.openxmlformats.org/drawingml/2006/main" xmlns:mc="http://schemas.openxmlformats.org/markup-compatibility/2006" mc:Ignorable="a16">
+<p:sld xmlns:a="http://schemas.openxmlformats.org/drawingml/2006/main" xmlns:r="http://schemas.openxmlformats.org/officeDocument/2006/relationships" xmlns:p="http://schemas.openxmlformats.org/presentationml/2006/main">
   <p:cSld>
     <p:spTree>
       <p:nvGrpSpPr>
-        <p:cNvPr id="167" name=""/>
+        <p:cNvPr id="1" name=""/>
         <p:cNvGrpSpPr/>
         <p:nvPr/>
       </p:nvGrpSpPr>
@@ -21206,7 +20620,6 @@
           <a:bodyPr/>
           <a:lstStyle/>
           <a:p>
-            <a:pPr/>
             <a:r>
               <a:rPr lang="zh-CN" altLang="en-US" sz="2100" b="1" dirty="0" smtClean="0">
                 <a:solidFill>
@@ -21252,7 +20665,6 @@
           <a:bodyPr/>
           <a:lstStyle/>
           <a:p>
-            <a:pPr/>
             <a:endParaRPr/>
           </a:p>
         </p:txBody>
@@ -21316,7 +20728,6 @@
           <a:bodyPr/>
           <a:lstStyle/>
           <a:p>
-            <a:pPr/>
             <a:endParaRPr/>
           </a:p>
         </p:txBody>
@@ -21379,7 +20790,7 @@
                 <a:latin typeface="Microsoft YaHei"/>
                 <a:ea typeface="Microsoft YaHei"/>
               </a:rPr>
-              <a:t xml:space="preserve">1/4/7/10 </a:t>
+              <a:t>1/4/7/10 </a:t>
             </a:r>
             <a:r>
               <a:rPr lang="zh-CN" altLang="en-US" sz="1200" b="1" dirty="0">
@@ -21409,7 +20820,7 @@
                 <a:latin typeface="Microsoft YaHei"/>
                 <a:ea typeface="Microsoft YaHei"/>
               </a:rPr>
-              <a:t xml:space="preserve">一档偏离目标 </a:t>
+              <a:t>一档偏离目标 </a:t>
             </a:r>
             <a:r>
               <a:rPr lang="en-US" altLang="zh-CN" sz="1200" b="1" dirty="0">
@@ -21419,7 +20830,7 @@
                 <a:latin typeface="Microsoft YaHei"/>
                 <a:ea typeface="Microsoft YaHei"/>
               </a:rPr>
-              <a:t xml:space="preserve">±5% </a:t>
+              <a:t>±5% </a:t>
             </a:r>
             <a:r>
               <a:rPr lang="zh-CN" altLang="en-US" sz="1200" b="1" dirty="0">
@@ -21521,7 +20932,7 @@
                 <a:latin typeface="Microsoft YaHei"/>
                 <a:ea typeface="Microsoft YaHei"/>
               </a:rPr>
-              <a:t xml:space="preserve">全部采用 </a:t>
+              <a:t>全部采用 </a:t>
             </a:r>
             <a:r>
               <a:rPr lang="en-US" altLang="zh-CN" sz="1200" b="1" dirty="0">
@@ -21531,7 +20942,7 @@
                 <a:latin typeface="Microsoft YaHei"/>
                 <a:ea typeface="Microsoft YaHei"/>
               </a:rPr>
-              <a:t xml:space="preserve">A </a:t>
+              <a:t>A </a:t>
             </a:r>
             <a:r>
               <a:rPr lang="zh-CN" altLang="en-US" sz="1200" b="1" dirty="0">
@@ -21551,7 +20962,7 @@
                 <a:latin typeface="Microsoft YaHei"/>
                 <a:ea typeface="Microsoft YaHei"/>
               </a:rPr>
-              <a:t xml:space="preserve">C </a:t>
+              <a:t>C </a:t>
             </a:r>
             <a:r>
               <a:rPr lang="zh-CN" altLang="en-US" sz="1200" b="1" dirty="0">
@@ -21561,7 +20972,7 @@
                 <a:latin typeface="Microsoft YaHei"/>
                 <a:ea typeface="Microsoft YaHei"/>
               </a:rPr>
-              <a:t xml:space="preserve">类每年 </a:t>
+              <a:t>类每年 </a:t>
             </a:r>
             <a:r>
               <a:rPr lang="en-US" altLang="zh-CN" sz="1200" b="1" dirty="0">
@@ -21571,7 +20982,7 @@
                 <a:latin typeface="Microsoft YaHei"/>
                 <a:ea typeface="Microsoft YaHei"/>
               </a:rPr>
-              <a:t xml:space="preserve">0.2%~0.4% </a:t>
+              <a:t>0.2%~0.4% </a:t>
             </a:r>
             <a:r>
               <a:rPr lang="zh-CN" altLang="en-US" sz="1200" b="1" dirty="0">
@@ -21654,30 +21065,22 @@
               <a:tblGrid>
                 <a:gridCol w="1486123">
                   <a:extLst>
-                    <a:ext uri="{9D8B030D-6E8A-4147-A177-3AD203B41FA5}">
-                      <a16:colId val="1"/>
-                    </a:ext>
+                    <a:ext uri="{9D8B030D-6E8A-4147-A177-3AD203B41FA5}"/>
                   </a:extLst>
                 </a:gridCol>
                 <a:gridCol w="3715307">
                   <a:extLst>
-                    <a:ext uri="{9D8B030D-6E8A-4147-A177-3AD203B41FA5}">
-                      <a16:colId val="2"/>
-                    </a:ext>
+                    <a:ext uri="{9D8B030D-6E8A-4147-A177-3AD203B41FA5}"/>
                   </a:extLst>
                 </a:gridCol>
                 <a:gridCol w="1238436">
                   <a:extLst>
-                    <a:ext uri="{9D8B030D-6E8A-4147-A177-3AD203B41FA5}">
-                      <a16:colId val="3"/>
-                    </a:ext>
+                    <a:ext uri="{9D8B030D-6E8A-4147-A177-3AD203B41FA5}"/>
                   </a:extLst>
                 </a:gridCol>
                 <a:gridCol w="1238436">
                   <a:extLst>
-                    <a:ext uri="{9D8B030D-6E8A-4147-A177-3AD203B41FA5}">
-                      <a16:colId val="4"/>
-                    </a:ext>
+                    <a:ext uri="{9D8B030D-6E8A-4147-A177-3AD203B41FA5}"/>
                   </a:extLst>
                 </a:gridCol>
               </a:tblGrid>
@@ -21931,9 +21334,7 @@
                   </a:tcPr>
                 </a:tc>
                 <a:extLst>
-                  <a:ext uri="{0D108BD9-81ED-4DB2-BD59-A6C34878D82A}">
-                    <a16:rowId val="1"/>
-                  </a:ext>
+                  <a:ext uri="{0D108BD9-81ED-4DB2-BD59-A6C34878D82A}"/>
                 </a:extLst>
               </a:tr>
               <a:tr h="340513">
@@ -22174,9 +21575,7 @@
                   </a:tcPr>
                 </a:tc>
                 <a:extLst>
-                  <a:ext uri="{0D108BD9-81ED-4DB2-BD59-A6C34878D82A}">
-                    <a16:rowId val="2"/>
-                  </a:ext>
+                  <a:ext uri="{0D108BD9-81ED-4DB2-BD59-A6C34878D82A}"/>
                 </a:extLst>
               </a:tr>
               <a:tr h="340513">
@@ -22417,9 +21816,7 @@
                   </a:tcPr>
                 </a:tc>
                 <a:extLst>
-                  <a:ext uri="{0D108BD9-81ED-4DB2-BD59-A6C34878D82A}">
-                    <a16:rowId val="3"/>
-                  </a:ext>
+                  <a:ext uri="{0D108BD9-81ED-4DB2-BD59-A6C34878D82A}"/>
                 </a:extLst>
               </a:tr>
               <a:tr h="340513">
@@ -22660,9 +22057,7 @@
                   </a:tcPr>
                 </a:tc>
                 <a:extLst>
-                  <a:ext uri="{0D108BD9-81ED-4DB2-BD59-A6C34878D82A}">
-                    <a16:rowId val="4"/>
-                  </a:ext>
+                  <a:ext uri="{0D108BD9-81ED-4DB2-BD59-A6C34878D82A}"/>
                 </a:extLst>
               </a:tr>
               <a:tr h="340513">
@@ -22932,9 +22327,7 @@
                   </a:tcPr>
                 </a:tc>
                 <a:extLst>
-                  <a:ext uri="{0D108BD9-81ED-4DB2-BD59-A6C34878D82A}">
-                    <a16:rowId val="5"/>
-                  </a:ext>
+                  <a:ext uri="{0D108BD9-81ED-4DB2-BD59-A6C34878D82A}"/>
                 </a:extLst>
               </a:tr>
               <a:tr h="340513">
@@ -23204,9 +22597,7 @@
                   </a:tcPr>
                 </a:tc>
                 <a:extLst>
-                  <a:ext uri="{0D108BD9-81ED-4DB2-BD59-A6C34878D82A}">
-                    <a16:rowId val="6"/>
-                  </a:ext>
+                  <a:ext uri="{0D108BD9-81ED-4DB2-BD59-A6C34878D82A}"/>
                 </a:extLst>
               </a:tr>
               <a:tr h="340513">
@@ -23476,9 +22867,7 @@
                   </a:tcPr>
                 </a:tc>
                 <a:extLst>
-                  <a:ext uri="{0D108BD9-81ED-4DB2-BD59-A6C34878D82A}">
-                    <a16:rowId val="7"/>
-                  </a:ext>
+                  <a:ext uri="{0D108BD9-81ED-4DB2-BD59-A6C34878D82A}"/>
                 </a:extLst>
               </a:tr>
               <a:tr h="340513">
@@ -23748,9 +23137,7 @@
                   </a:tcPr>
                 </a:tc>
                 <a:extLst>
-                  <a:ext uri="{0D108BD9-81ED-4DB2-BD59-A6C34878D82A}">
-                    <a16:rowId val="8"/>
-                  </a:ext>
+                  <a:ext uri="{0D108BD9-81ED-4DB2-BD59-A6C34878D82A}"/>
                 </a:extLst>
               </a:tr>
               <a:tr h="340513">
@@ -24020,9 +23407,7 @@
                   </a:tcPr>
                 </a:tc>
                 <a:extLst>
-                  <a:ext uri="{0D108BD9-81ED-4DB2-BD59-A6C34878D82A}">
-                    <a16:rowId val="9"/>
-                  </a:ext>
+                  <a:ext uri="{0D108BD9-81ED-4DB2-BD59-A6C34878D82A}"/>
                 </a:extLst>
               </a:tr>
               <a:tr h="340513">
@@ -24292,9 +23677,7 @@
                   </a:tcPr>
                 </a:tc>
                 <a:extLst>
-                  <a:ext uri="{0D108BD9-81ED-4DB2-BD59-A6C34878D82A}">
-                    <a16:rowId val="10"/>
-                  </a:ext>
+                  <a:ext uri="{0D108BD9-81ED-4DB2-BD59-A6C34878D82A}"/>
                 </a:extLst>
               </a:tr>
               <a:tr h="340513">
@@ -24535,9 +23918,7 @@
                   </a:tcPr>
                 </a:tc>
                 <a:extLst>
-                  <a:ext uri="{0D108BD9-81ED-4DB2-BD59-A6C34878D82A}">
-                    <a16:rowId val="11"/>
-                  </a:ext>
+                  <a:ext uri="{0D108BD9-81ED-4DB2-BD59-A6C34878D82A}"/>
                 </a:extLst>
               </a:tr>
             </a:tbl>
@@ -24837,6 +24218,8 @@
       </a:bgFillStyleLst>
     </a:fmtScheme>
   </a:themeElements>
+  <a:objectDefaults/>
+  <a:extraClrSchemeLst/>
 </a:theme>
 </file>
 
@@ -25125,5 +24508,7 @@
       </a:bgFillStyleLst>
     </a:fmtScheme>
   </a:themeElements>
+  <a:objectDefaults/>
+  <a:extraClrSchemeLst/>
 </a:theme>
 </file>